--- a/docs/career/Simple_Temp_Tool_Overview.pptx
+++ b/docs/career/Simple_Temp_Tool_Overview.pptx
@@ -4832,7 +4832,7 @@
                 </a:solidFill>
                 <a:latin typeface="游ゴシック"/>
               </a:rPr>
-              <a:t>単一 loop() を使わず、周期の異なる3タスクを時分割で実行することで処理の干渉を防止</a:t>
+              <a:t>単一 loop() を使わず、周期の異なる3タスクを millis() で時分割実行することで処理干渉を防止</a:t>
             </a:r>
           </a:p>
         </p:txBody>
@@ -4846,7 +4846,7 @@
         <p:spPr>
           <a:xfrm>
             <a:off x="320040" y="1691640"/>
-            <a:ext cx="3749039" cy="3383280"/>
+            <a:ext cx="3749039" cy="3703320"/>
           </a:xfrm>
           <a:prstGeom prst="rect">
             <a:avLst/>
@@ -5039,7 +5039,7 @@
         <p:spPr>
           <a:xfrm>
             <a:off x="457200" y="3081528"/>
-            <a:ext cx="3474719" cy="1828800"/>
+            <a:ext cx="3474719" cy="2194560"/>
           </a:xfrm>
           <a:prstGeom prst="rect">
             <a:avLst/>
@@ -5054,15 +5054,18 @@
           <a:p>
             <a:pPr algn="l"/>
             <a:r>
-              <a:rPr sz="1300" b="0" i="0">
+              <a:rPr sz="1200" b="0" i="0">
                 <a:solidFill>
                   <a:srgbClr val="1A1A2E"/>
                 </a:solidFill>
                 <a:latin typeface="游ゴシック"/>
               </a:rPr>
-              <a:t>・センサ読取（MAX31855 / SPI）
-・ローパスフィルタ（α=0.1）
-・アラーム判定（HI/LO比較）</a:t>
+              <a:t>・M5.update()（ボタンエッジ検出）
+・センサ読取（MAX31855 / SPI）
+　　読取間隔は TC_READ_INTERVAL=500ms
+・LPFフィルタ適用（α=0.1）
+・アラーム判定（ヒステリシス付き）
+・SD書込（10行バッファごと）</a:t>
             </a:r>
           </a:p>
         </p:txBody>
@@ -5076,7 +5079,7 @@
         <p:spPr>
           <a:xfrm>
             <a:off x="4279392" y="1691640"/>
-            <a:ext cx="3749039" cy="3383280"/>
+            <a:ext cx="3749039" cy="3703320"/>
           </a:xfrm>
           <a:prstGeom prst="rect">
             <a:avLst/>
@@ -5269,7 +5272,7 @@
         <p:spPr>
           <a:xfrm>
             <a:off x="4416552" y="3081528"/>
-            <a:ext cx="3474719" cy="1828800"/>
+            <a:ext cx="3474719" cy="2194560"/>
           </a:xfrm>
           <a:prstGeom prst="rect">
             <a:avLst/>
@@ -5284,15 +5287,17 @@
           <a:p>
             <a:pPr algn="l"/>
             <a:r>
-              <a:rPr sz="1300" b="0" i="0">
+              <a:rPr sz="1200" b="0" i="0">
                 <a:solidFill>
                   <a:srgbClr val="1A1A2E"/>
                 </a:solidFill>
                 <a:latin typeface="游ゴシック"/>
               </a:rPr>
-              <a:t>・Welford法による統計更新
-　（平均・分散・標準偏差）
-・SDカードへのバッファ書込</a:t>
+              <a:t>・Welford法による逐次統計更新
+　（Average / StdDev / Max / Min）
+・ボタンA/B/C イベント処理
+・状態遷移制御
+・EEPROM保存処理（設定確定時）</a:t>
             </a:r>
           </a:p>
         </p:txBody>
@@ -5306,7 +5311,7 @@
         <p:spPr>
           <a:xfrm>
             <a:off x="8238744" y="1691640"/>
-            <a:ext cx="3749039" cy="3383280"/>
+            <a:ext cx="3749039" cy="3703320"/>
           </a:xfrm>
           <a:prstGeom prst="rect">
             <a:avLst/>
@@ -5499,7 +5504,7 @@
         <p:spPr>
           <a:xfrm>
             <a:off x="8375904" y="3081528"/>
-            <a:ext cx="3474719" cy="1828800"/>
+            <a:ext cx="3474719" cy="2194560"/>
           </a:xfrm>
           <a:prstGeom prst="rect">
             <a:avLst/>
@@ -5514,15 +5519,17 @@
           <a:p>
             <a:pPr algn="l"/>
             <a:r>
-              <a:rPr sz="1300" b="0" i="0">
+              <a:rPr sz="1200" b="0" i="0">
                 <a:solidFill>
                   <a:srgbClr val="1A1A2E"/>
                 </a:solidFill>
                 <a:latin typeface="游ゴシック"/>
               </a:rPr>
-              <a:t>・LCDへの画面描画
-・ボタン入力の判定
-・状態遷移制御</a:t>
+              <a:t>・状態別LCD画面描画
+　IDLE / RUN / RESULT(2ページ)
+　ALARM_SETTING
+・センサエラー / SD状態表示
+・アラーム時は温度を赤色表示</a:t>
             </a:r>
           </a:p>
         </p:txBody>
@@ -5535,8 +5542,8 @@
         </p:nvSpPr>
         <p:spPr>
           <a:xfrm>
-            <a:off x="320040" y="5257800"/>
-            <a:ext cx="4572000" cy="365760"/>
+            <a:off x="320040" y="5650992"/>
+            <a:ext cx="11430000" cy="347472"/>
           </a:xfrm>
           <a:prstGeom prst="rect">
             <a:avLst/>
@@ -5551,48 +5558,13 @@
           <a:p>
             <a:pPr algn="l"/>
             <a:r>
-              <a:rPr sz="1600" b="1" i="0">
+              <a:rPr sz="1200" b="0" i="0">
                 <a:solidFill>
                   <a:srgbClr val="0D2B45"/>
                 </a:solidFill>
                 <a:latin typeface="游ゴシック"/>
               </a:rPr>
-              <a:t>6モジュール構成</a:t>
-            </a:r>
-          </a:p>
-        </p:txBody>
-      </p:sp>
-      <p:sp>
-        <p:nvSpPr>
-          <p:cNvPr id="30" name="TextBox 29"/>
-          <p:cNvSpPr txBox="1"/>
-          <p:nvPr/>
-        </p:nvSpPr>
-        <p:spPr>
-          <a:xfrm>
-            <a:off x="320040" y="5623560"/>
-            <a:ext cx="11430000" cy="365760"/>
-          </a:xfrm>
-          <a:prstGeom prst="rect">
-            <a:avLst/>
-          </a:prstGeom>
-          <a:noFill/>
-        </p:spPr>
-        <p:txBody>
-          <a:bodyPr wrap="square">
-            <a:spAutoFit/>
-          </a:bodyPr>
-          <a:lstStyle/>
-          <a:p>
-            <a:pPr algn="l"/>
-            <a:r>
-              <a:rPr sz="1300" b="0" i="0">
-                <a:solidFill>
-                  <a:srgbClr val="1A1A2E"/>
-                </a:solidFill>
-                <a:latin typeface="游ゴシック"/>
-              </a:rPr>
-              <a:t>MeasurementCore  /  IOController  /  DisplayManager  /  SDManager  /  EEPROMManager  /  Tasks</a:t>
+              <a:t>💡  IO_Taskのセンサ読取は10ms周期だが実際の読取は TC_READ_INTERVAL_MS=500ms ごと（MAX31855変換完了を待つ設計）</a:t>
             </a:r>
           </a:p>
         </p:txBody>
@@ -5936,7 +5908,7 @@
         <p:spPr>
           <a:xfrm>
             <a:off x="320040" y="1097280"/>
-            <a:ext cx="10972800" cy="457200"/>
+            <a:ext cx="10972800" cy="411480"/>
           </a:xfrm>
           <a:prstGeom prst="rect">
             <a:avLst/>
@@ -5970,8 +5942,8 @@
         </p:nvSpPr>
         <p:spPr>
           <a:xfrm>
-            <a:off x="320040" y="1645920"/>
-            <a:ext cx="7680960" cy="1828800"/>
+            <a:off x="320040" y="1600200"/>
+            <a:ext cx="7680960" cy="2240280"/>
           </a:xfrm>
           <a:prstGeom prst="rect">
             <a:avLst/>
@@ -6015,8 +5987,8 @@
         </p:nvSpPr>
         <p:spPr>
           <a:xfrm>
-            <a:off x="457200" y="1691640"/>
-            <a:ext cx="7315200" cy="1737360"/>
+            <a:off x="457200" y="1664208"/>
+            <a:ext cx="7315200" cy="2103120"/>
           </a:xfrm>
           <a:prstGeom prst="rect">
             <a:avLst/>
@@ -6037,10 +6009,12 @@
                 </a:solidFill>
                 <a:latin typeface="游ゴシック"/>
               </a:rPr>
-              <a:t>計測データを配列に蓄積せず、サンプルが来るたびに逐次的に
-平均・分散・標準偏差を更新するアルゴリズム。
-採用理由：長時間計測でも RAM 使用量が増加しない。
-結果：RAM使用率 7.2% を計測時間によらず一定に維持。</a:t>
+              <a:t>計測データを配列に蓄積せず、サンプルが来るたびに逐次的に平均・分散・標準偏差を更新。
+double型で計算することで float の丸め誤差を最小化。
+  delta  = x[n] − prevMean
+  Sum   += x[n]  →  newMean = Sum / Count
+  M2    += delta × (x[n] − newMean)
+  StdDev = √(M2 / Count)   ← Logic_Task 50ms周期で毎回計算</a:t>
             </a:r>
           </a:p>
         </p:txBody>
@@ -6053,8 +6027,8 @@
         </p:nvSpPr>
         <p:spPr>
           <a:xfrm>
-            <a:off x="8229600" y="1645920"/>
-            <a:ext cx="3291840" cy="1828800"/>
+            <a:off x="8229600" y="1600200"/>
+            <a:ext cx="3291840" cy="2240280"/>
           </a:xfrm>
           <a:prstGeom prst="rect">
             <a:avLst/>
@@ -6098,7 +6072,7 @@
         </p:nvSpPr>
         <p:spPr>
           <a:xfrm>
-            <a:off x="8229600" y="1645920"/>
+            <a:off x="8229600" y="1600200"/>
             <a:ext cx="3291840" cy="64008"/>
           </a:xfrm>
           <a:prstGeom prst="rect">
@@ -6141,7 +6115,7 @@
         </p:nvSpPr>
         <p:spPr>
           <a:xfrm>
-            <a:off x="8366760" y="1755648"/>
+            <a:off x="8366760" y="1709928"/>
             <a:ext cx="3017520" cy="320040"/>
           </a:xfrm>
           <a:prstGeom prst="rect">
@@ -6176,8 +6150,8 @@
         </p:nvSpPr>
         <p:spPr>
           <a:xfrm>
-            <a:off x="8321040" y="2011680"/>
-            <a:ext cx="3108960" cy="1371600"/>
+            <a:off x="8321040" y="1965960"/>
+            <a:ext cx="3108960" cy="1783080"/>
           </a:xfrm>
           <a:prstGeom prst="rect">
             <a:avLst/>
@@ -6192,14 +6166,15 @@
           <a:p>
             <a:pPr algn="l"/>
             <a:r>
-              <a:rPr sz="2000" b="1" i="0">
+              <a:rPr sz="1800" b="1" i="0">
                 <a:solidFill>
                   <a:srgbClr val="27AE60"/>
                 </a:solidFill>
                 <a:latin typeface="游ゴシック"/>
               </a:rPr>
               <a:t>7.2%
-（計測中も一定）</a:t>
+（計測時間に
+依存しない）</a:t>
             </a:r>
           </a:p>
         </p:txBody>
@@ -6212,8 +6187,8 @@
         </p:nvSpPr>
         <p:spPr>
           <a:xfrm>
-            <a:off x="320040" y="3657600"/>
-            <a:ext cx="10972800" cy="457200"/>
+            <a:off x="320040" y="3977639"/>
+            <a:ext cx="10972800" cy="411480"/>
           </a:xfrm>
           <a:prstGeom prst="rect">
             <a:avLst/>
@@ -6247,8 +6222,8 @@
         </p:nvSpPr>
         <p:spPr>
           <a:xfrm>
-            <a:off x="320040" y="4206240"/>
-            <a:ext cx="7680960" cy="1645920"/>
+            <a:off x="320040" y="4480560"/>
+            <a:ext cx="7680960" cy="1737360"/>
           </a:xfrm>
           <a:prstGeom prst="rect">
             <a:avLst/>
@@ -6292,8 +6267,8 @@
         </p:nvSpPr>
         <p:spPr>
           <a:xfrm>
-            <a:off x="457200" y="4251960"/>
-            <a:ext cx="7315200" cy="1554480"/>
+            <a:off x="457200" y="4544568"/>
+            <a:ext cx="7315200" cy="1627632"/>
           </a:xfrm>
           <a:prstGeom prst="rect">
             <a:avLst/>
@@ -6314,9 +6289,10 @@
                 </a:solidFill>
                 <a:latin typeface="游ゴシック"/>
               </a:rPr>
-              <a:t>前回値を 90%・新規値を 10% の重みで加重平均。
-  filtered = 0.9 × prev + 0.1 × raw
-α = 0.1 は実機での目視確認と CSV データ分析によりチューニング。</a:t>
+              <a:t>IO_Task（10ms周期）内で TC_READ_INTERVAL_MS=500ms の間隔で適用。
+α = FILTER_ALPHA = 0.1f（Global.h 定義）
+  filtered[n] = filtered[n-1] × (1 − α)  +  raw[n] × α
+初回読取時は raw値をそのまま初期値に設定（NaN収束待ち回避）。</a:t>
             </a:r>
           </a:p>
         </p:txBody>
@@ -6329,8 +6305,8 @@
         </p:nvSpPr>
         <p:spPr>
           <a:xfrm>
-            <a:off x="8229600" y="4206240"/>
-            <a:ext cx="3291840" cy="1645920"/>
+            <a:off x="8229600" y="4480560"/>
+            <a:ext cx="3291840" cy="1737360"/>
           </a:xfrm>
           <a:prstGeom prst="rect">
             <a:avLst/>
@@ -6374,7 +6350,7 @@
         </p:nvSpPr>
         <p:spPr>
           <a:xfrm>
-            <a:off x="8229600" y="4206240"/>
+            <a:off x="8229600" y="4480560"/>
             <a:ext cx="3291840" cy="64008"/>
           </a:xfrm>
           <a:prstGeom prst="rect">
@@ -6417,7 +6393,7 @@
         </p:nvSpPr>
         <p:spPr>
           <a:xfrm>
-            <a:off x="8366760" y="4315968"/>
+            <a:off x="8366760" y="4590288"/>
             <a:ext cx="3017520" cy="320040"/>
           </a:xfrm>
           <a:prstGeom prst="rect">
@@ -6452,8 +6428,8 @@
         </p:nvSpPr>
         <p:spPr>
           <a:xfrm>
-            <a:off x="8321040" y="4572000"/>
-            <a:ext cx="3108960" cy="1188720"/>
+            <a:off x="8321040" y="4846320"/>
+            <a:ext cx="3108960" cy="1280160"/>
           </a:xfrm>
           <a:prstGeom prst="rect">
             <a:avLst/>
@@ -6468,14 +6444,50 @@
           <a:p>
             <a:pPr algn="l"/>
             <a:r>
-              <a:rPr sz="2000" b="1" i="0">
+              <a:rPr sz="1800" b="1" i="0">
                 <a:solidFill>
                   <a:srgbClr val="E8621A"/>
                 </a:solidFill>
                 <a:latin typeface="游ゴシック"/>
               </a:rPr>
               <a:t>±1℃
-（MAX31855 仕様準拠）</a:t>
+（MAX31855
+仕様準拠）</a:t>
+            </a:r>
+          </a:p>
+        </p:txBody>
+      </p:sp>
+      <p:sp>
+        <p:nvSpPr>
+          <p:cNvPr id="24" name="TextBox 23"/>
+          <p:cNvSpPr txBox="1"/>
+          <p:nvPr/>
+        </p:nvSpPr>
+        <p:spPr>
+          <a:xfrm>
+            <a:off x="320040" y="6355080"/>
+            <a:ext cx="10972800" cy="347472"/>
+          </a:xfrm>
+          <a:prstGeom prst="rect">
+            <a:avLst/>
+          </a:prstGeom>
+          <a:noFill/>
+        </p:spPr>
+        <p:txBody>
+          <a:bodyPr wrap="square">
+            <a:spAutoFit/>
+          </a:bodyPr>
+          <a:lstStyle/>
+          <a:p>
+            <a:pPr algn="l"/>
+            <a:r>
+              <a:rPr sz="1500" b="1" i="0">
+                <a:solidFill>
+                  <a:srgbClr val="0D2B45"/>
+                </a:solidFill>
+                <a:latin typeface="游ゴシック"/>
+              </a:rPr>
+              <a:t>③ ヒステリシス付きアラーム判定（updateAlarmFlags）</a:t>
             </a:r>
           </a:p>
         </p:txBody>
@@ -17089,7 +17101,7 @@
               </a:rPr>
               <a:t>K型熱電対 + MAX31855 使用
 計測範囲：−200〜1350℃  精度：±1℃
-10ms周期でセンサ読取、LPFでノイズ除去</a:t>
+500ms間隔でセンサ読取、LPF（α=0.1）でノイズ除去</a:t>
             </a:r>
           </a:p>
         </p:txBody>
@@ -17249,7 +17261,7 @@
               </a:rPr>
               <a:t>計測中に 平均・標準偏差・最大・最小 を自動更新
 Welford法（逐次更新）でRAMを消費せず処理
-計測終了時に最終統計値を画面表示</a:t>
+計測終了時に最終統計値をページ表示</a:t>
             </a:r>
           </a:p>
         </p:txBody>
@@ -17407,9 +17419,9 @@
                 </a:solidFill>
                 <a:latin typeface="游ゴシック"/>
               </a:rPr>
-              <a:t>MicroSDカードに DATA_0001.csv 形式で自動記録
-PC（Excel）で直接読み込み・グラフ化が可能
-手入力工数をゼロに</a:t>
+              <a:t>MicroSDカードに DATA_0000.csv 形式で自動記録
+10列フォーマット（経過時間・温度・統計・アラームフラグ等）
+計測ごとに連番で自動採番</a:t>
             </a:r>
           </a:p>
         </p:txBody>
@@ -17567,9 +17579,9 @@
                 </a:solidFill>
                 <a:latin typeface="游ゴシック"/>
               </a:rPr>
-              <a:t>上限・下限温度を EEPROM に設定・保存
-超過した瞬間に画面でリアルタイム通知
-設定値は電源OFF後も保持</a:t>
+              <a:t>上限（HI）・下限（LO）温度を EEPROM に設定・保存
+超過の瞬間にビープ音 + 画面でリアルタイム通知
+ヒステリシス（±5℃）でチラつき防止</a:t>
             </a:r>
           </a:p>
         </p:txBody>
@@ -17692,7 +17704,7 @@
                 </a:solidFill>
                 <a:latin typeface="游ゴシック"/>
               </a:rPr>
-              <a:t>⑤ ワンボタン操作</a:t>
+              <a:t>⑤ 3ボタン操作</a:t>
             </a:r>
           </a:p>
         </p:txBody>
@@ -17727,9 +17739,9 @@
                 </a:solidFill>
                 <a:latin typeface="游ゴシック"/>
               </a:rPr>
-              <a:t>ボタン1回押し：計測開始
-ボタンもう1回押し：計測終了・統計表示
-手順書不要、誰でも操作可能</a:t>
+              <a:t>BtnA：計測開始/終了/画面遷移
+BtnB：アラーム設定モード進入/設定値+5℃
+BtnC：設定値 −5℃</a:t>
             </a:r>
           </a:p>
         </p:txBody>
@@ -18119,8 +18131,8 @@
               </a:tblPr>
               <a:tblGrid>
                 <a:gridCol w="2011680"/>
-                <a:gridCol w="5486400"/>
-                <a:gridCol w="4023360"/>
+                <a:gridCol w="5669280"/>
+                <a:gridCol w="3840480"/>
               </a:tblGrid>
               <a:tr h="457200">
                 <a:tc>
@@ -18230,7 +18242,7 @@
                           </a:solidFill>
                           <a:latin typeface="游ゴシック"/>
                         </a:rPr>
-                        <a:t>"Simple Temp Tool v1.0.0" が数秒表示</a:t>
+                        <a:t>"Temperature Eval Tool  Refactored Version" が数秒表示</a:t>
                       </a:r>
                     </a:p>
                   </a:txBody>
@@ -18301,7 +18313,7 @@
                           </a:solidFill>
                           <a:latin typeface="游ゴシック"/>
                         </a:rPr>
-                        <a:t>現在の温度（℃）がリアルタイムで表示される</a:t>
+                        <a:t>現在の温度（℃）がリアルタイム表示（500ms更新）</a:t>
                       </a:r>
                     </a:p>
                   </a:txBody>
@@ -18324,7 +18336,7 @@
                           </a:solidFill>
                           <a:latin typeface="游ゴシック"/>
                         </a:rPr>
-                        <a:t>更新間隔：約200ms</a:t>
+                        <a:t>センサ未接続時は "---.- C" 表示</a:t>
                       </a:r>
                     </a:p>
                   </a:txBody>
@@ -18349,7 +18361,7 @@
                           </a:solidFill>
                           <a:latin typeface="游ゴシック"/>
                         </a:rPr>
-                        <a:t>統計エリア</a:t>
+                        <a:t>ボタンガイド</a:t>
                       </a:r>
                     </a:p>
                   </a:txBody>
@@ -18372,7 +18384,7 @@
                           </a:solidFill>
                           <a:latin typeface="游ゴシック"/>
                         </a:rPr>
-                        <a:t>Avg / StdDev / Max / Min すべて "--" 表示</a:t>
+                        <a:t>画面下部に [BtnA] Start  [BtnB] Setting を表示</a:t>
                       </a:r>
                     </a:p>
                   </a:txBody>
@@ -18395,7 +18407,7 @@
                           </a:solidFill>
                           <a:latin typeface="游ゴシック"/>
                         </a:rPr>
-                        <a:t>計測開始前は値なし</a:t>
+                        <a:t>常時表示</a:t>
                       </a:r>
                     </a:p>
                   </a:txBody>
@@ -18420,7 +18432,7 @@
                           </a:solidFill>
                           <a:latin typeface="游ゴシック"/>
                         </a:rPr>
-                        <a:t>アラーム設定値</a:t>
+                        <a:t>SDカード状態</a:t>
                       </a:r>
                     </a:p>
                   </a:txBody>
@@ -18443,7 +18455,7 @@
                           </a:solidFill>
                           <a:latin typeface="游ゴシック"/>
                         </a:rPr>
-                        <a:t>HI / LO の設定温度が画面右側に表示</a:t>
+                        <a:t>SDReady または SD Error が画面に表示される</a:t>
                       </a:r>
                     </a:p>
                   </a:txBody>
@@ -18466,7 +18478,7 @@
                           </a:solidFill>
                           <a:latin typeface="游ゴシック"/>
                         </a:rPr>
-                        <a:t>EEPROMに保存済みの値</a:t>
+                        <a:t>初期化失敗時はシリアルにも出力</a:t>
                       </a:r>
                     </a:p>
                   </a:txBody>
@@ -18491,7 +18503,7 @@
                           </a:solidFill>
                           <a:latin typeface="游ゴシック"/>
                         </a:rPr>
-                        <a:t>SDカード</a:t>
+                        <a:t>センサ初期化</a:t>
                       </a:r>
                     </a:p>
                   </a:txBody>
@@ -18514,7 +18526,7 @@
                           </a:solidFill>
                           <a:latin typeface="游ゴシック"/>
                         </a:rPr>
-                        <a:t>SD アイコンが表示されていれば正常認識</a:t>
+                        <a:t>起動時に最大5回リトライ（間隔500ms）</a:t>
                       </a:r>
                     </a:p>
                   </a:txBody>
@@ -18537,7 +18549,7 @@
                           </a:solidFill>
                           <a:latin typeface="游ゴシック"/>
                         </a:rPr>
-                        <a:t>認識失敗時はエラーメッセージ表示</a:t>
+                        <a:t>失敗しても起動継続（---.- C表示）</a:t>
                       </a:r>
                     </a:p>
                   </a:txBody>
@@ -18653,7 +18665,7 @@
                 </a:solidFill>
                 <a:latin typeface="游ゴシック"/>
               </a:rPr>
-              <a:t>💡  センサが正常接続されていれば、起動後すぐに温度表示が始まります。ボタンを押すまで計測データは記録されません。</a:t>
+              <a:t>💡  センサが正常接続されていれば起動後すぐに温度表示が始まります。BtnA を押すまで計測データは記録されません。</a:t>
             </a:r>
           </a:p>
         </p:txBody>
@@ -18835,7 +18847,7 @@
                 </a:solidFill>
                 <a:latin typeface="游ゴシック"/>
               </a:rPr>
-              <a:t>操作マニュアル ② — 計測開始・終了（RUN / RESULT）</a:t>
+              <a:t>操作マニュアル ② — 状態遷移と計測操作</a:t>
             </a:r>
           </a:p>
         </p:txBody>
@@ -18996,8 +19008,8 @@
         </p:nvSpPr>
         <p:spPr>
           <a:xfrm>
-            <a:off x="365760" y="1188720"/>
-            <a:ext cx="3566160" cy="2560320"/>
+            <a:off x="320040" y="1188720"/>
+            <a:ext cx="2743200" cy="2926080"/>
           </a:xfrm>
           <a:prstGeom prst="rect">
             <a:avLst/>
@@ -19039,8 +19051,8 @@
         </p:nvSpPr>
         <p:spPr>
           <a:xfrm>
-            <a:off x="502920" y="1325880"/>
-            <a:ext cx="3291840" cy="1005840"/>
+            <a:off x="429768" y="1280160"/>
+            <a:ext cx="2523744" cy="777240"/>
           </a:xfrm>
           <a:prstGeom prst="rect">
             <a:avLst/>
@@ -19055,14 +19067,13 @@
           <a:p>
             <a:pPr algn="ctr"/>
             <a:r>
-              <a:rPr sz="2000" b="1" i="0">
+              <a:rPr sz="1900" b="1" i="0">
                 <a:solidFill>
                   <a:srgbClr val="FFFFFF"/>
                 </a:solidFill>
                 <a:latin typeface="游ゴシック"/>
               </a:rPr>
-              <a:t>IDLE
-（待機中）</a:t>
+              <a:t>IDLE</a:t>
             </a:r>
           </a:p>
         </p:txBody>
@@ -19075,8 +19086,8 @@
         </p:nvSpPr>
         <p:spPr>
           <a:xfrm>
-            <a:off x="502920" y="2240280"/>
-            <a:ext cx="3291840" cy="1371600"/>
+            <a:off x="429768" y="2057400"/>
+            <a:ext cx="2523744" cy="731520"/>
           </a:xfrm>
           <a:prstGeom prst="rect">
             <a:avLst/>
@@ -19091,28 +19102,71 @@
           <a:p>
             <a:pPr algn="ctr"/>
             <a:r>
-              <a:rPr sz="1300" b="0" i="0">
+              <a:rPr sz="1200" b="0" i="0">
                 <a:solidFill>
                   <a:srgbClr val="FFFFFF"/>
                 </a:solidFill>
                 <a:latin typeface="游ゴシック"/>
               </a:rPr>
-              <a:t>電源ON直後
-温度がリアルタイム表示</a:t>
-            </a:r>
-          </a:p>
-        </p:txBody>
-      </p:sp>
-      <p:sp>
-        <p:nvSpPr>
-          <p:cNvPr id="13" name="TextBox 12"/>
+              <a:t>待機中
+温度リアルタイム表示</a:t>
+            </a:r>
+          </a:p>
+        </p:txBody>
+      </p:sp>
+      <p:sp>
+        <p:nvSpPr>
+          <p:cNvPr id="13" name="Rectangle 12"/>
+          <p:cNvSpPr/>
+          <p:nvPr/>
+        </p:nvSpPr>
+        <p:spPr>
+          <a:xfrm>
+            <a:off x="429768" y="2816352"/>
+            <a:ext cx="2523744" cy="18288"/>
+          </a:xfrm>
+          <a:prstGeom prst="rect">
+            <a:avLst/>
+          </a:prstGeom>
+          <a:solidFill>
+            <a:srgbClr val="FFFFFF"/>
+          </a:solidFill>
+          <a:ln>
+            <a:noFill/>
+          </a:ln>
+        </p:spPr>
+        <p:style>
+          <a:lnRef idx="1">
+            <a:schemeClr val="accent1"/>
+          </a:lnRef>
+          <a:fillRef idx="3">
+            <a:schemeClr val="accent1"/>
+          </a:fillRef>
+          <a:effectRef idx="2">
+            <a:schemeClr val="accent1"/>
+          </a:effectRef>
+          <a:fontRef idx="minor">
+            <a:schemeClr val="lt1"/>
+          </a:fontRef>
+        </p:style>
+        <p:txBody>
+          <a:bodyPr rtlCol="0" anchor="ctr"/>
+          <a:lstStyle/>
+          <a:p>
+            <a:pPr algn="ctr"/>
+          </a:p>
+        </p:txBody>
+      </p:sp>
+      <p:sp>
+        <p:nvSpPr>
+          <p:cNvPr id="14" name="TextBox 13"/>
           <p:cNvSpPr txBox="1"/>
           <p:nvPr/>
         </p:nvSpPr>
         <p:spPr>
           <a:xfrm>
-            <a:off x="3977640" y="2103120"/>
-            <a:ext cx="320040" cy="731520"/>
+            <a:off x="429768" y="2880360"/>
+            <a:ext cx="2523744" cy="1143000"/>
           </a:xfrm>
           <a:prstGeom prst="rect">
             <a:avLst/>
@@ -19125,9 +19179,45 @@
           </a:bodyPr>
           <a:lstStyle/>
           <a:p>
+            <a:pPr algn="l"/>
+            <a:r>
+              <a:rPr sz="1100" b="0" i="0">
+                <a:solidFill>
+                  <a:srgbClr val="FFFFFF"/>
+                </a:solidFill>
+                <a:latin typeface="游ゴシック"/>
+              </a:rPr>
+              <a:t>BtnA → RUN
+BtnB → ALARM_SETTING</a:t>
+            </a:r>
+          </a:p>
+        </p:txBody>
+      </p:sp>
+      <p:sp>
+        <p:nvSpPr>
+          <p:cNvPr id="15" name="TextBox 14"/>
+          <p:cNvSpPr txBox="1"/>
+          <p:nvPr/>
+        </p:nvSpPr>
+        <p:spPr>
+          <a:xfrm>
+            <a:off x="3136392" y="2286000"/>
+            <a:ext cx="137160" cy="731520"/>
+          </a:xfrm>
+          <a:prstGeom prst="rect">
+            <a:avLst/>
+          </a:prstGeom>
+          <a:noFill/>
+        </p:spPr>
+        <p:txBody>
+          <a:bodyPr wrap="square">
+            <a:spAutoFit/>
+          </a:bodyPr>
+          <a:lstStyle/>
+          <a:p>
             <a:pPr algn="ctr"/>
             <a:r>
-              <a:rPr sz="2800" b="0" i="0">
+              <a:rPr sz="2000" b="0" i="0">
                 <a:solidFill>
                   <a:srgbClr val="8899AA"/>
                 </a:solidFill>
@@ -19140,14 +19230,14 @@
       </p:sp>
       <p:sp>
         <p:nvSpPr>
-          <p:cNvPr id="14" name="Rectangle 13"/>
+          <p:cNvPr id="16" name="Rectangle 15"/>
           <p:cNvSpPr/>
           <p:nvPr/>
         </p:nvSpPr>
         <p:spPr>
           <a:xfrm>
-            <a:off x="4251960" y="1188720"/>
-            <a:ext cx="3566160" cy="2560320"/>
+            <a:off x="3291840" y="1188720"/>
+            <a:ext cx="2743200" cy="2926080"/>
           </a:xfrm>
           <a:prstGeom prst="rect">
             <a:avLst/>
@@ -19183,14 +19273,14 @@
       </p:sp>
       <p:sp>
         <p:nvSpPr>
-          <p:cNvPr id="15" name="TextBox 14"/>
+          <p:cNvPr id="17" name="TextBox 16"/>
           <p:cNvSpPr txBox="1"/>
           <p:nvPr/>
         </p:nvSpPr>
         <p:spPr>
           <a:xfrm>
-            <a:off x="4389120" y="1325880"/>
-            <a:ext cx="3291840" cy="1005840"/>
+            <a:off x="3401568" y="1280160"/>
+            <a:ext cx="2523744" cy="777240"/>
           </a:xfrm>
           <a:prstGeom prst="rect">
             <a:avLst/>
@@ -19205,28 +19295,27 @@
           <a:p>
             <a:pPr algn="ctr"/>
             <a:r>
-              <a:rPr sz="2000" b="1" i="0">
+              <a:rPr sz="1900" b="1" i="0">
                 <a:solidFill>
                   <a:srgbClr val="FFFFFF"/>
                 </a:solidFill>
                 <a:latin typeface="游ゴシック"/>
               </a:rPr>
-              <a:t>RUN
-（計測中）</a:t>
-            </a:r>
-          </a:p>
-        </p:txBody>
-      </p:sp>
-      <p:sp>
-        <p:nvSpPr>
-          <p:cNvPr id="16" name="TextBox 15"/>
+              <a:t>RUN</a:t>
+            </a:r>
+          </a:p>
+        </p:txBody>
+      </p:sp>
+      <p:sp>
+        <p:nvSpPr>
+          <p:cNvPr id="18" name="TextBox 17"/>
           <p:cNvSpPr txBox="1"/>
           <p:nvPr/>
         </p:nvSpPr>
         <p:spPr>
           <a:xfrm>
-            <a:off x="4389120" y="2240280"/>
-            <a:ext cx="3291840" cy="1371600"/>
+            <a:off x="3401568" y="2057400"/>
+            <a:ext cx="2523744" cy="731520"/>
           </a:xfrm>
           <a:prstGeom prst="rect">
             <a:avLst/>
@@ -19241,29 +19330,71 @@
           <a:p>
             <a:pPr algn="ctr"/>
             <a:r>
-              <a:rPr sz="1300" b="0" i="0">
+              <a:rPr sz="1200" b="0" i="0">
                 <a:solidFill>
                   <a:srgbClr val="FFFFFF"/>
                 </a:solidFill>
                 <a:latin typeface="游ゴシック"/>
               </a:rPr>
-              <a:t>ボタン1回押し
-CSVへ自動記録開始
-アラーム監視が有効化</a:t>
-            </a:r>
-          </a:p>
-        </p:txBody>
-      </p:sp>
-      <p:sp>
-        <p:nvSpPr>
-          <p:cNvPr id="17" name="TextBox 16"/>
+              <a:t>計測中
+CSV自動記録・統計更新</a:t>
+            </a:r>
+          </a:p>
+        </p:txBody>
+      </p:sp>
+      <p:sp>
+        <p:nvSpPr>
+          <p:cNvPr id="19" name="Rectangle 18"/>
+          <p:cNvSpPr/>
+          <p:nvPr/>
+        </p:nvSpPr>
+        <p:spPr>
+          <a:xfrm>
+            <a:off x="3401568" y="2816352"/>
+            <a:ext cx="2523744" cy="18288"/>
+          </a:xfrm>
+          <a:prstGeom prst="rect">
+            <a:avLst/>
+          </a:prstGeom>
+          <a:solidFill>
+            <a:srgbClr val="FFFFFF"/>
+          </a:solidFill>
+          <a:ln>
+            <a:noFill/>
+          </a:ln>
+        </p:spPr>
+        <p:style>
+          <a:lnRef idx="1">
+            <a:schemeClr val="accent1"/>
+          </a:lnRef>
+          <a:fillRef idx="3">
+            <a:schemeClr val="accent1"/>
+          </a:fillRef>
+          <a:effectRef idx="2">
+            <a:schemeClr val="accent1"/>
+          </a:effectRef>
+          <a:fontRef idx="minor">
+            <a:schemeClr val="lt1"/>
+          </a:fontRef>
+        </p:style>
+        <p:txBody>
+          <a:bodyPr rtlCol="0" anchor="ctr"/>
+          <a:lstStyle/>
+          <a:p>
+            <a:pPr algn="ctr"/>
+          </a:p>
+        </p:txBody>
+      </p:sp>
+      <p:sp>
+        <p:nvSpPr>
+          <p:cNvPr id="20" name="TextBox 19"/>
           <p:cNvSpPr txBox="1"/>
           <p:nvPr/>
         </p:nvSpPr>
         <p:spPr>
           <a:xfrm>
-            <a:off x="7863840" y="2103120"/>
-            <a:ext cx="320040" cy="731520"/>
+            <a:off x="3401568" y="2880360"/>
+            <a:ext cx="2523744" cy="1143000"/>
           </a:xfrm>
           <a:prstGeom prst="rect">
             <a:avLst/>
@@ -19276,9 +19407,44 @@
           </a:bodyPr>
           <a:lstStyle/>
           <a:p>
+            <a:pPr algn="l"/>
+            <a:r>
+              <a:rPr sz="1100" b="0" i="0">
+                <a:solidFill>
+                  <a:srgbClr val="FFFFFF"/>
+                </a:solidFill>
+                <a:latin typeface="游ゴシック"/>
+              </a:rPr>
+              <a:t>BtnA → RESULT</a:t>
+            </a:r>
+          </a:p>
+        </p:txBody>
+      </p:sp>
+      <p:sp>
+        <p:nvSpPr>
+          <p:cNvPr id="21" name="TextBox 20"/>
+          <p:cNvSpPr txBox="1"/>
+          <p:nvPr/>
+        </p:nvSpPr>
+        <p:spPr>
+          <a:xfrm>
+            <a:off x="6108192" y="2286000"/>
+            <a:ext cx="137160" cy="731520"/>
+          </a:xfrm>
+          <a:prstGeom prst="rect">
+            <a:avLst/>
+          </a:prstGeom>
+          <a:noFill/>
+        </p:spPr>
+        <p:txBody>
+          <a:bodyPr wrap="square">
+            <a:spAutoFit/>
+          </a:bodyPr>
+          <a:lstStyle/>
+          <a:p>
             <a:pPr algn="ctr"/>
             <a:r>
-              <a:rPr sz="2800" b="0" i="0">
+              <a:rPr sz="2000" b="0" i="0">
                 <a:solidFill>
                   <a:srgbClr val="8899AA"/>
                 </a:solidFill>
@@ -19291,14 +19457,14 @@
       </p:sp>
       <p:sp>
         <p:nvSpPr>
-          <p:cNvPr id="18" name="Rectangle 17"/>
+          <p:cNvPr id="22" name="Rectangle 21"/>
           <p:cNvSpPr/>
           <p:nvPr/>
         </p:nvSpPr>
         <p:spPr>
           <a:xfrm>
-            <a:off x="8138160" y="1188720"/>
-            <a:ext cx="3566160" cy="2560320"/>
+            <a:off x="6263640" y="1188720"/>
+            <a:ext cx="2743200" cy="2926080"/>
           </a:xfrm>
           <a:prstGeom prst="rect">
             <a:avLst/>
@@ -19334,14 +19500,14 @@
       </p:sp>
       <p:sp>
         <p:nvSpPr>
-          <p:cNvPr id="19" name="TextBox 18"/>
+          <p:cNvPr id="23" name="TextBox 22"/>
           <p:cNvSpPr txBox="1"/>
           <p:nvPr/>
         </p:nvSpPr>
         <p:spPr>
           <a:xfrm>
-            <a:off x="8275320" y="1325880"/>
-            <a:ext cx="3291840" cy="1005840"/>
+            <a:off x="6373368" y="1280160"/>
+            <a:ext cx="2523744" cy="777240"/>
           </a:xfrm>
           <a:prstGeom prst="rect">
             <a:avLst/>
@@ -19356,28 +19522,27 @@
           <a:p>
             <a:pPr algn="ctr"/>
             <a:r>
-              <a:rPr sz="2000" b="1" i="0">
+              <a:rPr sz="1900" b="1" i="0">
                 <a:solidFill>
                   <a:srgbClr val="FFFFFF"/>
                 </a:solidFill>
                 <a:latin typeface="游ゴシック"/>
               </a:rPr>
-              <a:t>RESULT
-（結果表示）</a:t>
-            </a:r>
-          </a:p>
-        </p:txBody>
-      </p:sp>
-      <p:sp>
-        <p:nvSpPr>
-          <p:cNvPr id="20" name="TextBox 19"/>
+              <a:t>RESULT</a:t>
+            </a:r>
+          </a:p>
+        </p:txBody>
+      </p:sp>
+      <p:sp>
+        <p:nvSpPr>
+          <p:cNvPr id="24" name="TextBox 23"/>
           <p:cNvSpPr txBox="1"/>
           <p:nvPr/>
         </p:nvSpPr>
         <p:spPr>
           <a:xfrm>
-            <a:off x="8275320" y="2240280"/>
-            <a:ext cx="3291840" cy="1371600"/>
+            <a:off x="6373368" y="2057400"/>
+            <a:ext cx="2523744" cy="731520"/>
           </a:xfrm>
           <a:prstGeom prst="rect">
             <a:avLst/>
@@ -19392,30 +19557,337 @@
           <a:p>
             <a:pPr algn="ctr"/>
             <a:r>
-              <a:rPr sz="1300" b="0" i="0">
+              <a:rPr sz="1200" b="0" i="0">
                 <a:solidFill>
                   <a:srgbClr val="FFFFFF"/>
                 </a:solidFill>
                 <a:latin typeface="游ゴシック"/>
               </a:rPr>
-              <a:t>ボタンもう1回押し
-統計値が画面表示
-CSVファイル完成</a:t>
+              <a:t>結果表示
+統計値を2ページ表示</a:t>
+            </a:r>
+          </a:p>
+        </p:txBody>
+      </p:sp>
+      <p:sp>
+        <p:nvSpPr>
+          <p:cNvPr id="25" name="Rectangle 24"/>
+          <p:cNvSpPr/>
+          <p:nvPr/>
+        </p:nvSpPr>
+        <p:spPr>
+          <a:xfrm>
+            <a:off x="6373368" y="2816352"/>
+            <a:ext cx="2523744" cy="18288"/>
+          </a:xfrm>
+          <a:prstGeom prst="rect">
+            <a:avLst/>
+          </a:prstGeom>
+          <a:solidFill>
+            <a:srgbClr val="FFFFFF"/>
+          </a:solidFill>
+          <a:ln>
+            <a:noFill/>
+          </a:ln>
+        </p:spPr>
+        <p:style>
+          <a:lnRef idx="1">
+            <a:schemeClr val="accent1"/>
+          </a:lnRef>
+          <a:fillRef idx="3">
+            <a:schemeClr val="accent1"/>
+          </a:fillRef>
+          <a:effectRef idx="2">
+            <a:schemeClr val="accent1"/>
+          </a:effectRef>
+          <a:fontRef idx="minor">
+            <a:schemeClr val="lt1"/>
+          </a:fontRef>
+        </p:style>
+        <p:txBody>
+          <a:bodyPr rtlCol="0" anchor="ctr"/>
+          <a:lstStyle/>
+          <a:p>
+            <a:pPr algn="ctr"/>
+          </a:p>
+        </p:txBody>
+      </p:sp>
+      <p:sp>
+        <p:nvSpPr>
+          <p:cNvPr id="26" name="TextBox 25"/>
+          <p:cNvSpPr txBox="1"/>
+          <p:nvPr/>
+        </p:nvSpPr>
+        <p:spPr>
+          <a:xfrm>
+            <a:off x="6373368" y="2880360"/>
+            <a:ext cx="2523744" cy="1143000"/>
+          </a:xfrm>
+          <a:prstGeom prst="rect">
+            <a:avLst/>
+          </a:prstGeom>
+          <a:noFill/>
+        </p:spPr>
+        <p:txBody>
+          <a:bodyPr wrap="square">
+            <a:spAutoFit/>
+          </a:bodyPr>
+          <a:lstStyle/>
+          <a:p>
+            <a:pPr algn="l"/>
+            <a:r>
+              <a:rPr sz="1100" b="0" i="0">
+                <a:solidFill>
+                  <a:srgbClr val="FFFFFF"/>
+                </a:solidFill>
+                <a:latin typeface="游ゴシック"/>
+              </a:rPr>
+              <a:t>BtnA → IDLE
+BtnB → ページ切替</a:t>
+            </a:r>
+          </a:p>
+        </p:txBody>
+      </p:sp>
+      <p:sp>
+        <p:nvSpPr>
+          <p:cNvPr id="27" name="TextBox 26"/>
+          <p:cNvSpPr txBox="1"/>
+          <p:nvPr/>
+        </p:nvSpPr>
+        <p:spPr>
+          <a:xfrm>
+            <a:off x="9079992" y="2286000"/>
+            <a:ext cx="137160" cy="731520"/>
+          </a:xfrm>
+          <a:prstGeom prst="rect">
+            <a:avLst/>
+          </a:prstGeom>
+          <a:noFill/>
+        </p:spPr>
+        <p:txBody>
+          <a:bodyPr wrap="square">
+            <a:spAutoFit/>
+          </a:bodyPr>
+          <a:lstStyle/>
+          <a:p>
+            <a:pPr algn="ctr"/>
+            <a:r>
+              <a:rPr sz="2000" b="0" i="0">
+                <a:solidFill>
+                  <a:srgbClr val="8899AA"/>
+                </a:solidFill>
+                <a:latin typeface="游ゴシック"/>
+              </a:rPr>
+              <a:t>▶</a:t>
+            </a:r>
+          </a:p>
+        </p:txBody>
+      </p:sp>
+      <p:sp>
+        <p:nvSpPr>
+          <p:cNvPr id="28" name="Rectangle 27"/>
+          <p:cNvSpPr/>
+          <p:nvPr/>
+        </p:nvSpPr>
+        <p:spPr>
+          <a:xfrm>
+            <a:off x="9235440" y="1188720"/>
+            <a:ext cx="2743200" cy="2926080"/>
+          </a:xfrm>
+          <a:prstGeom prst="rect">
+            <a:avLst/>
+          </a:prstGeom>
+          <a:solidFill>
+            <a:srgbClr val="7B2782"/>
+          </a:solidFill>
+          <a:ln>
+            <a:noFill/>
+          </a:ln>
+        </p:spPr>
+        <p:style>
+          <a:lnRef idx="1">
+            <a:schemeClr val="accent1"/>
+          </a:lnRef>
+          <a:fillRef idx="3">
+            <a:schemeClr val="accent1"/>
+          </a:fillRef>
+          <a:effectRef idx="2">
+            <a:schemeClr val="accent1"/>
+          </a:effectRef>
+          <a:fontRef idx="minor">
+            <a:schemeClr val="lt1"/>
+          </a:fontRef>
+        </p:style>
+        <p:txBody>
+          <a:bodyPr rtlCol="0" anchor="ctr"/>
+          <a:lstStyle/>
+          <a:p>
+            <a:pPr algn="ctr"/>
+          </a:p>
+        </p:txBody>
+      </p:sp>
+      <p:sp>
+        <p:nvSpPr>
+          <p:cNvPr id="29" name="TextBox 28"/>
+          <p:cNvSpPr txBox="1"/>
+          <p:nvPr/>
+        </p:nvSpPr>
+        <p:spPr>
+          <a:xfrm>
+            <a:off x="9345168" y="1280160"/>
+            <a:ext cx="2523744" cy="777240"/>
+          </a:xfrm>
+          <a:prstGeom prst="rect">
+            <a:avLst/>
+          </a:prstGeom>
+          <a:noFill/>
+        </p:spPr>
+        <p:txBody>
+          <a:bodyPr wrap="square">
+            <a:spAutoFit/>
+          </a:bodyPr>
+          <a:lstStyle/>
+          <a:p>
+            <a:pPr algn="ctr"/>
+            <a:r>
+              <a:rPr sz="1900" b="1" i="0">
+                <a:solidFill>
+                  <a:srgbClr val="FFFFFF"/>
+                </a:solidFill>
+                <a:latin typeface="游ゴシック"/>
+              </a:rPr>
+              <a:t>ALARM
+SETTING</a:t>
+            </a:r>
+          </a:p>
+        </p:txBody>
+      </p:sp>
+      <p:sp>
+        <p:nvSpPr>
+          <p:cNvPr id="30" name="TextBox 29"/>
+          <p:cNvSpPr txBox="1"/>
+          <p:nvPr/>
+        </p:nvSpPr>
+        <p:spPr>
+          <a:xfrm>
+            <a:off x="9345168" y="2057400"/>
+            <a:ext cx="2523744" cy="731520"/>
+          </a:xfrm>
+          <a:prstGeom prst="rect">
+            <a:avLst/>
+          </a:prstGeom>
+          <a:noFill/>
+        </p:spPr>
+        <p:txBody>
+          <a:bodyPr wrap="square">
+            <a:spAutoFit/>
+          </a:bodyPr>
+          <a:lstStyle/>
+          <a:p>
+            <a:pPr algn="ctr"/>
+            <a:r>
+              <a:rPr sz="1200" b="0" i="0">
+                <a:solidFill>
+                  <a:srgbClr val="FFFFFF"/>
+                </a:solidFill>
+                <a:latin typeface="游ゴシック"/>
+              </a:rPr>
+              <a:t>アラーム設定中
+HI/LO値を調整</a:t>
+            </a:r>
+          </a:p>
+        </p:txBody>
+      </p:sp>
+      <p:sp>
+        <p:nvSpPr>
+          <p:cNvPr id="31" name="Rectangle 30"/>
+          <p:cNvSpPr/>
+          <p:nvPr/>
+        </p:nvSpPr>
+        <p:spPr>
+          <a:xfrm>
+            <a:off x="9345168" y="2816352"/>
+            <a:ext cx="2523744" cy="18288"/>
+          </a:xfrm>
+          <a:prstGeom prst="rect">
+            <a:avLst/>
+          </a:prstGeom>
+          <a:solidFill>
+            <a:srgbClr val="FFFFFF"/>
+          </a:solidFill>
+          <a:ln>
+            <a:noFill/>
+          </a:ln>
+        </p:spPr>
+        <p:style>
+          <a:lnRef idx="1">
+            <a:schemeClr val="accent1"/>
+          </a:lnRef>
+          <a:fillRef idx="3">
+            <a:schemeClr val="accent1"/>
+          </a:fillRef>
+          <a:effectRef idx="2">
+            <a:schemeClr val="accent1"/>
+          </a:effectRef>
+          <a:fontRef idx="minor">
+            <a:schemeClr val="lt1"/>
+          </a:fontRef>
+        </p:style>
+        <p:txBody>
+          <a:bodyPr rtlCol="0" anchor="ctr"/>
+          <a:lstStyle/>
+          <a:p>
+            <a:pPr algn="ctr"/>
+          </a:p>
+        </p:txBody>
+      </p:sp>
+      <p:sp>
+        <p:nvSpPr>
+          <p:cNvPr id="32" name="TextBox 31"/>
+          <p:cNvSpPr txBox="1"/>
+          <p:nvPr/>
+        </p:nvSpPr>
+        <p:spPr>
+          <a:xfrm>
+            <a:off x="9345168" y="2880360"/>
+            <a:ext cx="2523744" cy="1143000"/>
+          </a:xfrm>
+          <a:prstGeom prst="rect">
+            <a:avLst/>
+          </a:prstGeom>
+          <a:noFill/>
+        </p:spPr>
+        <p:txBody>
+          <a:bodyPr wrap="square">
+            <a:spAutoFit/>
+          </a:bodyPr>
+          <a:lstStyle/>
+          <a:p>
+            <a:pPr algn="l"/>
+            <a:r>
+              <a:rPr sz="1100" b="0" i="0">
+                <a:solidFill>
+                  <a:srgbClr val="FFFFFF"/>
+                </a:solidFill>
+                <a:latin typeface="游ゴシック"/>
+              </a:rPr>
+              <a:t>BtnA → 項目切替 / 保存→IDLE
+BtnB → +5℃  BtnC → −5℃</a:t>
             </a:r>
           </a:p>
         </p:txBody>
       </p:sp>
       <p:graphicFrame>
         <p:nvGraphicFramePr>
-          <p:cNvPr id="21" name="Table 20"/>
+          <p:cNvPr id="33" name="Table 32"/>
           <p:cNvGraphicFramePr>
             <a:graphicFrameLocks noGrp="1"/>
           </p:cNvGraphicFramePr>
           <p:nvPr/>
         </p:nvGraphicFramePr>
         <p:xfrm>
-          <a:off x="320040" y="3977639"/>
-          <a:ext cx="11521440" cy="1828800"/>
+          <a:off x="320040" y="4297680"/>
+          <a:ext cx="11521440" cy="2011680"/>
         </p:xfrm>
         <a:graphic>
           <a:graphicData uri="http://schemas.openxmlformats.org/drawingml/2006/table">
@@ -19424,21 +19896,22 @@
                 <a:tableStyleId>{5C22544A-7EE6-4342-B048-85BDC9FD1C3A}</a:tableStyleId>
               </a:tblPr>
               <a:tblGrid>
-                <a:gridCol w="1645920"/>
-                <a:gridCol w="2377440"/>
-                <a:gridCol w="2377440"/>
-                <a:gridCol w="2377440"/>
-                <a:gridCol w="2743200"/>
+                <a:gridCol w="1920240"/>
+                <a:gridCol w="2286000"/>
+                <a:gridCol w="2468880"/>
+                <a:gridCol w="1463040"/>
+                <a:gridCol w="1463040"/>
+                <a:gridCol w="1920240"/>
               </a:tblGrid>
-              <a:tr h="457200">
-                <a:tc>
-                  <a:txBody>
-                    <a:bodyPr wrap="square"/>
-                    <a:lstStyle/>
-                    <a:p>
-                      <a:pPr algn="l"/>
-                      <a:r>
-                        <a:rPr sz="1300" b="1">
+              <a:tr h="402336">
+                <a:tc>
+                  <a:txBody>
+                    <a:bodyPr wrap="square"/>
+                    <a:lstStyle/>
+                    <a:p>
+                      <a:pPr algn="l"/>
+                      <a:r>
+                        <a:rPr sz="1200" b="1">
                           <a:solidFill>
                             <a:srgbClr val="FFFFFF"/>
                           </a:solidFill>
@@ -19461,13 +19934,13 @@
                     <a:p>
                       <a:pPr algn="l"/>
                       <a:r>
-                        <a:rPr sz="1300" b="1">
+                        <a:rPr sz="1200" b="1">
                           <a:solidFill>
                             <a:srgbClr val="FFFFFF"/>
                           </a:solidFill>
                           <a:latin typeface="游ゴシック"/>
                         </a:rPr>
-                        <a:t>ボタン操作</a:t>
+                        <a:t>BtnA</a:t>
                       </a:r>
                     </a:p>
                   </a:txBody>
@@ -19484,13 +19957,13 @@
                     <a:p>
                       <a:pPr algn="l"/>
                       <a:r>
-                        <a:rPr sz="1300" b="1">
+                        <a:rPr sz="1200" b="1">
                           <a:solidFill>
                             <a:srgbClr val="FFFFFF"/>
                           </a:solidFill>
                           <a:latin typeface="游ゴシック"/>
                         </a:rPr>
-                        <a:t>CSVへの記録</a:t>
+                        <a:t>BtnB</a:t>
                       </a:r>
                     </a:p>
                   </a:txBody>
@@ -19507,13 +19980,13 @@
                     <a:p>
                       <a:pPr algn="l"/>
                       <a:r>
-                        <a:rPr sz="1300" b="1">
+                        <a:rPr sz="1200" b="1">
                           <a:solidFill>
                             <a:srgbClr val="FFFFFF"/>
                           </a:solidFill>
                           <a:latin typeface="游ゴシック"/>
                         </a:rPr>
-                        <a:t>アラーム監視</a:t>
+                        <a:t>BtnC</a:t>
                       </a:r>
                     </a:p>
                   </a:txBody>
@@ -19530,13 +20003,13 @@
                     <a:p>
                       <a:pPr algn="l"/>
                       <a:r>
-                        <a:rPr sz="1300" b="1">
+                        <a:rPr sz="1200" b="1">
                           <a:solidFill>
                             <a:srgbClr val="FFFFFF"/>
                           </a:solidFill>
                           <a:latin typeface="游ゴシック"/>
                         </a:rPr>
-                        <a:t>統計値更新</a:t>
+                        <a:t>CSV記録</a:t>
                       </a:r>
                     </a:p>
                   </a:txBody>
@@ -19546,16 +20019,39 @@
                     </a:solidFill>
                   </a:tcPr>
                 </a:tc>
+                <a:tc>
+                  <a:txBody>
+                    <a:bodyPr wrap="square"/>
+                    <a:lstStyle/>
+                    <a:p>
+                      <a:pPr algn="l"/>
+                      <a:r>
+                        <a:rPr sz="1200" b="1">
+                          <a:solidFill>
+                            <a:srgbClr val="FFFFFF"/>
+                          </a:solidFill>
+                          <a:latin typeface="游ゴシック"/>
+                        </a:rPr>
+                        <a:t>統計更新</a:t>
+                      </a:r>
+                    </a:p>
+                  </a:txBody>
+                  <a:tcPr>
+                    <a:solidFill>
+                      <a:srgbClr val="0D2B45"/>
+                    </a:solidFill>
+                  </a:tcPr>
+                </a:tc>
               </a:tr>
-              <a:tr h="457200">
-                <a:tc>
-                  <a:txBody>
-                    <a:bodyPr wrap="square"/>
-                    <a:lstStyle/>
-                    <a:p>
-                      <a:pPr algn="l"/>
-                      <a:r>
-                        <a:rPr sz="1300" b="0">
+              <a:tr h="402336">
+                <a:tc>
+                  <a:txBody>
+                    <a:bodyPr wrap="square"/>
+                    <a:lstStyle/>
+                    <a:p>
+                      <a:pPr algn="l"/>
+                      <a:r>
+                        <a:rPr sz="1200" b="0">
                           <a:solidFill>
                             <a:srgbClr val="1A1A2E"/>
                           </a:solidFill>
@@ -19578,13 +20074,13 @@
                     <a:p>
                       <a:pPr algn="l"/>
                       <a:r>
-                        <a:rPr sz="1300" b="0">
+                        <a:rPr sz="1200" b="0">
                           <a:solidFill>
                             <a:srgbClr val="1A1A2E"/>
                           </a:solidFill>
                           <a:latin typeface="游ゴシック"/>
                         </a:rPr>
-                        <a:t>押すと→RUNへ</a:t>
+                        <a:t>→ RUN（計測開始）</a:t>
                       </a:r>
                     </a:p>
                   </a:txBody>
@@ -19601,12 +20097,35 @@
                     <a:p>
                       <a:pPr algn="l"/>
                       <a:r>
-                        <a:rPr sz="1300" b="0">
+                        <a:rPr sz="1200" b="0">
                           <a:solidFill>
                             <a:srgbClr val="1A1A2E"/>
                           </a:solidFill>
                           <a:latin typeface="游ゴシック"/>
                         </a:rPr>
+                        <a:t>→ ALARM_SETTING進入</a:t>
+                      </a:r>
+                    </a:p>
+                  </a:txBody>
+                  <a:tcPr>
+                    <a:solidFill>
+                      <a:srgbClr val="FFFFFF"/>
+                    </a:solidFill>
+                  </a:tcPr>
+                </a:tc>
+                <a:tc>
+                  <a:txBody>
+                    <a:bodyPr wrap="square"/>
+                    <a:lstStyle/>
+                    <a:p>
+                      <a:pPr algn="l"/>
+                      <a:r>
+                        <a:rPr sz="1200" b="0">
+                          <a:solidFill>
+                            <a:srgbClr val="1A1A2E"/>
+                          </a:solidFill>
+                          <a:latin typeface="游ゴシック"/>
+                        </a:rPr>
                         <a:t>なし</a:t>
                       </a:r>
                     </a:p>
@@ -19624,7 +20143,7 @@
                     <a:p>
                       <a:pPr algn="l"/>
                       <a:r>
-                        <a:rPr sz="1300" b="0">
+                        <a:rPr sz="1200" b="0">
                           <a:solidFill>
                             <a:srgbClr val="1A1A2E"/>
                           </a:solidFill>
@@ -19647,7 +20166,7 @@
                     <a:p>
                       <a:pPr algn="l"/>
                       <a:r>
-                        <a:rPr sz="1300" b="0">
+                        <a:rPr sz="1200" b="0">
                           <a:solidFill>
                             <a:srgbClr val="1A1A2E"/>
                           </a:solidFill>
@@ -19664,15 +20183,15 @@
                   </a:tcPr>
                 </a:tc>
               </a:tr>
-              <a:tr h="457200">
-                <a:tc>
-                  <a:txBody>
-                    <a:bodyPr wrap="square"/>
-                    <a:lstStyle/>
-                    <a:p>
-                      <a:pPr algn="l"/>
-                      <a:r>
-                        <a:rPr sz="1300" b="0">
+              <a:tr h="402336">
+                <a:tc>
+                  <a:txBody>
+                    <a:bodyPr wrap="square"/>
+                    <a:lstStyle/>
+                    <a:p>
+                      <a:pPr algn="l"/>
+                      <a:r>
+                        <a:rPr sz="1200" b="0">
                           <a:solidFill>
                             <a:srgbClr val="1A1A2E"/>
                           </a:solidFill>
@@ -19695,13 +20214,13 @@
                     <a:p>
                       <a:pPr algn="l"/>
                       <a:r>
-                        <a:rPr sz="1300" b="0">
+                        <a:rPr sz="1200" b="0">
                           <a:solidFill>
                             <a:srgbClr val="1A1A2E"/>
                           </a:solidFill>
                           <a:latin typeface="游ゴシック"/>
                         </a:rPr>
-                        <a:t>押すと→RESULTへ</a:t>
+                        <a:t>→ RESULT（終了）</a:t>
                       </a:r>
                     </a:p>
                   </a:txBody>
@@ -19718,13 +20237,13 @@
                     <a:p>
                       <a:pPr algn="l"/>
                       <a:r>
-                        <a:rPr sz="1300" b="0">
+                        <a:rPr sz="1200" b="0">
                           <a:solidFill>
                             <a:srgbClr val="1A1A2E"/>
                           </a:solidFill>
                           <a:latin typeface="游ゴシック"/>
                         </a:rPr>
-                        <a:t>10サンプル毎</a:t>
+                        <a:t>なし</a:t>
                       </a:r>
                     </a:p>
                   </a:txBody>
@@ -19741,13 +20260,13 @@
                     <a:p>
                       <a:pPr algn="l"/>
                       <a:r>
-                        <a:rPr sz="1300" b="0">
+                        <a:rPr sz="1200" b="0">
                           <a:solidFill>
                             <a:srgbClr val="1A1A2E"/>
                           </a:solidFill>
                           <a:latin typeface="游ゴシック"/>
                         </a:rPr>
-                        <a:t>有効（HI/LO）</a:t>
+                        <a:t>なし</a:t>
                       </a:r>
                     </a:p>
                   </a:txBody>
@@ -19764,13 +20283,13 @@
                     <a:p>
                       <a:pPr algn="l"/>
                       <a:r>
-                        <a:rPr sz="1300" b="0">
+                        <a:rPr sz="1200" b="0">
                           <a:solidFill>
                             <a:srgbClr val="1A1A2E"/>
                           </a:solidFill>
                           <a:latin typeface="游ゴシック"/>
                         </a:rPr>
-                        <a:t>50ms周期</a:t>
+                        <a:t>10行毎</a:t>
                       </a:r>
                     </a:p>
                   </a:txBody>
@@ -19780,16 +20299,39 @@
                     </a:solidFill>
                   </a:tcPr>
                 </a:tc>
+                <a:tc>
+                  <a:txBody>
+                    <a:bodyPr wrap="square"/>
+                    <a:lstStyle/>
+                    <a:p>
+                      <a:pPr algn="l"/>
+                      <a:r>
+                        <a:rPr sz="1200" b="0">
+                          <a:solidFill>
+                            <a:srgbClr val="1A1A2E"/>
+                          </a:solidFill>
+                          <a:latin typeface="游ゴシック"/>
+                        </a:rPr>
+                        <a:t>50ms毎</a:t>
+                      </a:r>
+                    </a:p>
+                  </a:txBody>
+                  <a:tcPr>
+                    <a:solidFill>
+                      <a:srgbClr val="E8EEF4"/>
+                    </a:solidFill>
+                  </a:tcPr>
+                </a:tc>
               </a:tr>
-              <a:tr h="457200">
-                <a:tc>
-                  <a:txBody>
-                    <a:bodyPr wrap="square"/>
-                    <a:lstStyle/>
-                    <a:p>
-                      <a:pPr algn="l"/>
-                      <a:r>
-                        <a:rPr sz="1300" b="0">
+              <a:tr h="402336">
+                <a:tc>
+                  <a:txBody>
+                    <a:bodyPr wrap="square"/>
+                    <a:lstStyle/>
+                    <a:p>
+                      <a:pPr algn="l"/>
+                      <a:r>
+                        <a:rPr sz="1200" b="0">
                           <a:solidFill>
                             <a:srgbClr val="1A1A2E"/>
                           </a:solidFill>
@@ -19812,13 +20354,13 @@
                     <a:p>
                       <a:pPr algn="l"/>
                       <a:r>
-                        <a:rPr sz="1300" b="0">
+                        <a:rPr sz="1200" b="0">
                           <a:solidFill>
                             <a:srgbClr val="1A1A2E"/>
                           </a:solidFill>
                           <a:latin typeface="游ゴシック"/>
                         </a:rPr>
-                        <a:t>押すと→IDLEへ</a:t>
+                        <a:t>→ IDLE（リセット）</a:t>
                       </a:r>
                     </a:p>
                   </a:txBody>
@@ -19835,13 +20377,13 @@
                     <a:p>
                       <a:pPr algn="l"/>
                       <a:r>
-                        <a:rPr sz="1300" b="0">
+                        <a:rPr sz="1200" b="0">
                           <a:solidFill>
                             <a:srgbClr val="1A1A2E"/>
                           </a:solidFill>
                           <a:latin typeface="游ゴシック"/>
                         </a:rPr>
-                        <a:t>完了・保存済</a:t>
+                        <a:t>ページ切替（0↔1）</a:t>
                       </a:r>
                     </a:p>
                   </a:txBody>
@@ -19858,7 +20400,7 @@
                     <a:p>
                       <a:pPr algn="l"/>
                       <a:r>
-                        <a:rPr sz="1300" b="0">
+                        <a:rPr sz="1200" b="0">
                           <a:solidFill>
                             <a:srgbClr val="1A1A2E"/>
                           </a:solidFill>
@@ -19881,19 +20423,182 @@
                     <a:p>
                       <a:pPr algn="l"/>
                       <a:r>
-                        <a:rPr sz="1300" b="0">
+                        <a:rPr sz="1200" b="0">
                           <a:solidFill>
                             <a:srgbClr val="1A1A2E"/>
                           </a:solidFill>
                           <a:latin typeface="游ゴシック"/>
                         </a:rPr>
-                        <a:t>計測値で固定</a:t>
+                        <a:t>完了済</a:t>
                       </a:r>
                     </a:p>
                   </a:txBody>
                   <a:tcPr>
                     <a:solidFill>
                       <a:srgbClr val="FFFFFF"/>
+                    </a:solidFill>
+                  </a:tcPr>
+                </a:tc>
+                <a:tc>
+                  <a:txBody>
+                    <a:bodyPr wrap="square"/>
+                    <a:lstStyle/>
+                    <a:p>
+                      <a:pPr algn="l"/>
+                      <a:r>
+                        <a:rPr sz="1200" b="0">
+                          <a:solidFill>
+                            <a:srgbClr val="1A1A2E"/>
+                          </a:solidFill>
+                          <a:latin typeface="游ゴシック"/>
+                        </a:rPr>
+                        <a:t>固定</a:t>
+                      </a:r>
+                    </a:p>
+                  </a:txBody>
+                  <a:tcPr>
+                    <a:solidFill>
+                      <a:srgbClr val="FFFFFF"/>
+                    </a:solidFill>
+                  </a:tcPr>
+                </a:tc>
+              </a:tr>
+              <a:tr h="402336">
+                <a:tc>
+                  <a:txBody>
+                    <a:bodyPr wrap="square"/>
+                    <a:lstStyle/>
+                    <a:p>
+                      <a:pPr algn="l"/>
+                      <a:r>
+                        <a:rPr sz="1200" b="0">
+                          <a:solidFill>
+                            <a:srgbClr val="1A1A2E"/>
+                          </a:solidFill>
+                          <a:latin typeface="游ゴシック"/>
+                        </a:rPr>
+                        <a:t>ALARM_SETTING</a:t>
+                      </a:r>
+                    </a:p>
+                  </a:txBody>
+                  <a:tcPr>
+                    <a:solidFill>
+                      <a:srgbClr val="E8EEF4"/>
+                    </a:solidFill>
+                  </a:tcPr>
+                </a:tc>
+                <a:tc>
+                  <a:txBody>
+                    <a:bodyPr wrap="square"/>
+                    <a:lstStyle/>
+                    <a:p>
+                      <a:pPr algn="l"/>
+                      <a:r>
+                        <a:rPr sz="1200" b="0">
+                          <a:solidFill>
+                            <a:srgbClr val="1A1A2E"/>
+                          </a:solidFill>
+                          <a:latin typeface="游ゴシック"/>
+                        </a:rPr>
+                        <a:t>HI→LO / LO保存→IDLE</a:t>
+                      </a:r>
+                    </a:p>
+                  </a:txBody>
+                  <a:tcPr>
+                    <a:solidFill>
+                      <a:srgbClr val="E8EEF4"/>
+                    </a:solidFill>
+                  </a:tcPr>
+                </a:tc>
+                <a:tc>
+                  <a:txBody>
+                    <a:bodyPr wrap="square"/>
+                    <a:lstStyle/>
+                    <a:p>
+                      <a:pPr algn="l"/>
+                      <a:r>
+                        <a:rPr sz="1200" b="0">
+                          <a:solidFill>
+                            <a:srgbClr val="1A1A2E"/>
+                          </a:solidFill>
+                          <a:latin typeface="游ゴシック"/>
+                        </a:rPr>
+                        <a:t>+5℃ 調整</a:t>
+                      </a:r>
+                    </a:p>
+                  </a:txBody>
+                  <a:tcPr>
+                    <a:solidFill>
+                      <a:srgbClr val="E8EEF4"/>
+                    </a:solidFill>
+                  </a:tcPr>
+                </a:tc>
+                <a:tc>
+                  <a:txBody>
+                    <a:bodyPr wrap="square"/>
+                    <a:lstStyle/>
+                    <a:p>
+                      <a:pPr algn="l"/>
+                      <a:r>
+                        <a:rPr sz="1200" b="0">
+                          <a:solidFill>
+                            <a:srgbClr val="1A1A2E"/>
+                          </a:solidFill>
+                          <a:latin typeface="游ゴシック"/>
+                        </a:rPr>
+                        <a:t>−5℃ 調整</a:t>
+                      </a:r>
+                    </a:p>
+                  </a:txBody>
+                  <a:tcPr>
+                    <a:solidFill>
+                      <a:srgbClr val="E8EEF4"/>
+                    </a:solidFill>
+                  </a:tcPr>
+                </a:tc>
+                <a:tc>
+                  <a:txBody>
+                    <a:bodyPr wrap="square"/>
+                    <a:lstStyle/>
+                    <a:p>
+                      <a:pPr algn="l"/>
+                      <a:r>
+                        <a:rPr sz="1200" b="0">
+                          <a:solidFill>
+                            <a:srgbClr val="1A1A2E"/>
+                          </a:solidFill>
+                          <a:latin typeface="游ゴシック"/>
+                        </a:rPr>
+                        <a:t>なし</a:t>
+                      </a:r>
+                    </a:p>
+                  </a:txBody>
+                  <a:tcPr>
+                    <a:solidFill>
+                      <a:srgbClr val="E8EEF4"/>
+                    </a:solidFill>
+                  </a:tcPr>
+                </a:tc>
+                <a:tc>
+                  <a:txBody>
+                    <a:bodyPr wrap="square"/>
+                    <a:lstStyle/>
+                    <a:p>
+                      <a:pPr algn="l"/>
+                      <a:r>
+                        <a:rPr sz="1200" b="0">
+                          <a:solidFill>
+                            <a:srgbClr val="1A1A2E"/>
+                          </a:solidFill>
+                          <a:latin typeface="游ゴシック"/>
+                        </a:rPr>
+                        <a:t>なし</a:t>
+                      </a:r>
+                    </a:p>
+                  </a:txBody>
+                  <a:tcPr>
+                    <a:solidFill>
+                      <a:srgbClr val="E8EEF4"/>
                     </a:solidFill>
                   </a:tcPr>
                 </a:tc>
@@ -19904,7 +20609,7 @@
       </p:graphicFrame>
       <p:sp>
         <p:nvSpPr>
-          <p:cNvPr id="22" name="TextBox 21"/>
+          <p:cNvPr id="34" name="TextBox 33"/>
           <p:cNvSpPr txBox="1"/>
           <p:nvPr/>
         </p:nvSpPr>
@@ -19932,7 +20637,7 @@
                 </a:solidFill>
                 <a:latin typeface="游ゴシック"/>
               </a:rPr>
-              <a:t>⚠️  RUNからIDLEには直接戻れません。必ず RESULT を経由する設計です。</a:t>
+              <a:t>⚠️  RUN → IDLE への直接遷移はなし。必ず RESULT を経由します。ALARM_SETTING はIDLE起点のみ進入可能。</a:t>
             </a:r>
           </a:p>
         </p:txBody>
@@ -20114,7 +20819,7 @@
                 </a:solidFill>
                 <a:latin typeface="游ゴシック"/>
               </a:rPr>
-              <a:t>操作マニュアル ③ — アラーム設定</a:t>
+              <a:t>操作マニュアル ③ — アラーム設定（ALARM_SETTING）</a:t>
             </a:r>
           </a:p>
         </p:txBody>
@@ -20276,7 +20981,7 @@
         <p:spPr>
           <a:xfrm>
             <a:off x="320040" y="1097280"/>
-            <a:ext cx="11430000" cy="502920"/>
+            <a:ext cx="11430000" cy="475488"/>
           </a:xfrm>
           <a:prstGeom prst="rect">
             <a:avLst/>
@@ -20291,13 +20996,13 @@
           <a:p>
             <a:pPr algn="l"/>
             <a:r>
-              <a:rPr sz="1500" b="0" i="0">
+              <a:rPr sz="1400" b="0" i="0">
                 <a:solidFill>
                   <a:srgbClr val="1A1A2E"/>
                 </a:solidFill>
                 <a:latin typeface="游ゴシック"/>
               </a:rPr>
-              <a:t>上限（HI）・下限（LO）温度のアラームしきい値を設定・保存できます。設定値は EEPROM に記録され、電源OFF後も保持されます。</a:t>
+              <a:t>IDLE状態から BtnB を押すとアラーム設定モード（ALARM_SETTING）に遷移します。設定値は EEPROM に保存され電源OFF後も保持されます。</a:t>
             </a:r>
           </a:p>
         </p:txBody>
@@ -20311,8 +21016,8 @@
           <p:nvPr/>
         </p:nvGraphicFramePr>
         <p:xfrm>
-          <a:off x="320040" y="1737360"/>
-          <a:ext cx="11521440" cy="2514600"/>
+          <a:off x="320040" y="1664208"/>
+          <a:ext cx="11521439" cy="2852928"/>
         </p:xfrm>
         <a:graphic>
           <a:graphicData uri="http://schemas.openxmlformats.org/drawingml/2006/table">
@@ -20321,18 +21026,19 @@
                 <a:tableStyleId>{5C22544A-7EE6-4342-B048-85BDC9FD1C3A}</a:tableStyleId>
               </a:tblPr>
               <a:tblGrid>
-                <a:gridCol w="2560320"/>
-                <a:gridCol w="8961120"/>
+                <a:gridCol w="2377440"/>
+                <a:gridCol w="1188720"/>
+                <a:gridCol w="7955279"/>
               </a:tblGrid>
-              <a:tr h="502920">
-                <a:tc>
-                  <a:txBody>
-                    <a:bodyPr wrap="square"/>
-                    <a:lstStyle/>
-                    <a:p>
-                      <a:pPr algn="l"/>
-                      <a:r>
-                        <a:rPr sz="1400" b="1">
+              <a:tr h="475488">
+                <a:tc>
+                  <a:txBody>
+                    <a:bodyPr wrap="square"/>
+                    <a:lstStyle/>
+                    <a:p>
+                      <a:pPr algn="l"/>
+                      <a:r>
+                        <a:rPr sz="1300" b="1">
                           <a:solidFill>
                             <a:srgbClr val="FFFFFF"/>
                           </a:solidFill>
@@ -20355,12 +21061,35 @@
                     <a:p>
                       <a:pPr algn="l"/>
                       <a:r>
-                        <a:rPr sz="1400" b="1">
+                        <a:rPr sz="1300" b="1">
                           <a:solidFill>
                             <a:srgbClr val="FFFFFF"/>
                           </a:solidFill>
                           <a:latin typeface="游ゴシック"/>
                         </a:rPr>
+                        <a:t>ボタン</a:t>
+                      </a:r>
+                    </a:p>
+                  </a:txBody>
+                  <a:tcPr>
+                    <a:solidFill>
+                      <a:srgbClr val="0D2B45"/>
+                    </a:solidFill>
+                  </a:tcPr>
+                </a:tc>
+                <a:tc>
+                  <a:txBody>
+                    <a:bodyPr wrap="square"/>
+                    <a:lstStyle/>
+                    <a:p>
+                      <a:pPr algn="l"/>
+                      <a:r>
+                        <a:rPr sz="1300" b="1">
+                          <a:solidFill>
+                            <a:srgbClr val="FFFFFF"/>
+                          </a:solidFill>
+                          <a:latin typeface="游ゴシック"/>
+                        </a:rPr>
                         <a:t>手順の詳細</a:t>
                       </a:r>
                     </a:p>
@@ -20372,21 +21101,21 @@
                   </a:tcPr>
                 </a:tc>
               </a:tr>
-              <a:tr h="502920">
-                <a:tc>
-                  <a:txBody>
-                    <a:bodyPr wrap="square"/>
-                    <a:lstStyle/>
-                    <a:p>
-                      <a:pPr algn="l"/>
-                      <a:r>
-                        <a:rPr sz="1400" b="0">
+              <a:tr h="475488">
+                <a:tc>
+                  <a:txBody>
+                    <a:bodyPr wrap="square"/>
+                    <a:lstStyle/>
+                    <a:p>
+                      <a:pPr algn="l"/>
+                      <a:r>
+                        <a:rPr sz="1300" b="0">
                           <a:solidFill>
                             <a:srgbClr val="1A1A2E"/>
                           </a:solidFill>
                           <a:latin typeface="游ゴシック"/>
                         </a:rPr>
-                        <a:t>① 設定画面へ</a:t>
+                        <a:t>① 設定モードへ進入</a:t>
                       </a:r>
                     </a:p>
                   </a:txBody>
@@ -20403,13 +21132,13 @@
                     <a:p>
                       <a:pPr algn="l"/>
                       <a:r>
-                        <a:rPr sz="1400" b="0">
+                        <a:rPr sz="1300" b="0">
                           <a:solidFill>
                             <a:srgbClr val="1A1A2E"/>
                           </a:solidFill>
                           <a:latin typeface="游ゴシック"/>
                         </a:rPr>
-                        <a:t>IDLE状態でボタン長押し（約2秒）→ アラーム設定画面に遷移</a:t>
+                        <a:t>BtnB</a:t>
                       </a:r>
                     </a:p>
                   </a:txBody>
@@ -20419,22 +21148,45 @@
                     </a:solidFill>
                   </a:tcPr>
                 </a:tc>
+                <a:tc>
+                  <a:txBody>
+                    <a:bodyPr wrap="square"/>
+                    <a:lstStyle/>
+                    <a:p>
+                      <a:pPr algn="l"/>
+                      <a:r>
+                        <a:rPr sz="1300" b="0">
+                          <a:solidFill>
+                            <a:srgbClr val="1A1A2E"/>
+                          </a:solidFill>
+                          <a:latin typeface="游ゴシック"/>
+                        </a:rPr>
+                        <a:t>IDLE状態で BtnB を押す → ALARM_SETTING画面に遷移（HI設定から開始）</a:t>
+                      </a:r>
+                    </a:p>
+                  </a:txBody>
+                  <a:tcPr>
+                    <a:solidFill>
+                      <a:srgbClr val="FFFFFF"/>
+                    </a:solidFill>
+                  </a:tcPr>
+                </a:tc>
               </a:tr>
-              <a:tr h="502920">
-                <a:tc>
-                  <a:txBody>
-                    <a:bodyPr wrap="square"/>
-                    <a:lstStyle/>
-                    <a:p>
-                      <a:pPr algn="l"/>
-                      <a:r>
-                        <a:rPr sz="1400" b="0">
+              <a:tr h="475488">
+                <a:tc>
+                  <a:txBody>
+                    <a:bodyPr wrap="square"/>
+                    <a:lstStyle/>
+                    <a:p>
+                      <a:pPr algn="l"/>
+                      <a:r>
+                        <a:rPr sz="1300" b="0">
                           <a:solidFill>
                             <a:srgbClr val="1A1A2E"/>
                           </a:solidFill>
                           <a:latin typeface="游ゴシック"/>
                         </a:rPr>
-                        <a:t>② HI温度を設定</a:t>
+                        <a:t>② HI温度を調整</a:t>
                       </a:r>
                     </a:p>
                   </a:txBody>
@@ -20451,13 +21203,13 @@
                     <a:p>
                       <a:pPr algn="l"/>
                       <a:r>
-                        <a:rPr sz="1400" b="0">
+                        <a:rPr sz="1300" b="0">
                           <a:solidFill>
                             <a:srgbClr val="1A1A2E"/>
                           </a:solidFill>
                           <a:latin typeface="游ゴシック"/>
                         </a:rPr>
-                        <a:t>ボタン短押し：値を＋1℃ / 長押し：設定項目を切替</a:t>
+                        <a:t>BtnB/C</a:t>
                       </a:r>
                     </a:p>
                   </a:txBody>
@@ -20467,22 +21219,45 @@
                     </a:solidFill>
                   </a:tcPr>
                 </a:tc>
+                <a:tc>
+                  <a:txBody>
+                    <a:bodyPr wrap="square"/>
+                    <a:lstStyle/>
+                    <a:p>
+                      <a:pPr algn="l"/>
+                      <a:r>
+                        <a:rPr sz="1300" b="0">
+                          <a:solidFill>
+                            <a:srgbClr val="1A1A2E"/>
+                          </a:solidFill>
+                          <a:latin typeface="游ゴシック"/>
+                        </a:rPr>
+                        <a:t>BtnB : HI設定値を +5℃  /  BtnC : HI設定値を −5℃</a:t>
+                      </a:r>
+                    </a:p>
+                  </a:txBody>
+                  <a:tcPr>
+                    <a:solidFill>
+                      <a:srgbClr val="E8EEF4"/>
+                    </a:solidFill>
+                  </a:tcPr>
+                </a:tc>
               </a:tr>
-              <a:tr h="502920">
-                <a:tc>
-                  <a:txBody>
-                    <a:bodyPr wrap="square"/>
-                    <a:lstStyle/>
-                    <a:p>
-                      <a:pPr algn="l"/>
-                      <a:r>
-                        <a:rPr sz="1400" b="0">
+              <a:tr h="475488">
+                <a:tc>
+                  <a:txBody>
+                    <a:bodyPr wrap="square"/>
+                    <a:lstStyle/>
+                    <a:p>
+                      <a:pPr algn="l"/>
+                      <a:r>
+                        <a:rPr sz="1300" b="0">
                           <a:solidFill>
                             <a:srgbClr val="1A1A2E"/>
                           </a:solidFill>
                           <a:latin typeface="游ゴシック"/>
                         </a:rPr>
-                        <a:t>③ LO温度を設定</a:t>
+                        <a:t>③ LO設定へ切替</a:t>
                       </a:r>
                     </a:p>
                   </a:txBody>
@@ -20499,13 +21274,13 @@
                     <a:p>
                       <a:pPr algn="l"/>
                       <a:r>
-                        <a:rPr sz="1400" b="0">
+                        <a:rPr sz="1300" b="0">
                           <a:solidFill>
                             <a:srgbClr val="1A1A2E"/>
                           </a:solidFill>
                           <a:latin typeface="游ゴシック"/>
                         </a:rPr>
-                        <a:t>直前と同様にボタン操作で LO 値を調整</a:t>
+                        <a:t>BtnA</a:t>
                       </a:r>
                     </a:p>
                   </a:txBody>
@@ -20515,22 +21290,45 @@
                     </a:solidFill>
                   </a:tcPr>
                 </a:tc>
+                <a:tc>
+                  <a:txBody>
+                    <a:bodyPr wrap="square"/>
+                    <a:lstStyle/>
+                    <a:p>
+                      <a:pPr algn="l"/>
+                      <a:r>
+                        <a:rPr sz="1300" b="0">
+                          <a:solidFill>
+                            <a:srgbClr val="1A1A2E"/>
+                          </a:solidFill>
+                          <a:latin typeface="游ゴシック"/>
+                        </a:rPr>
+                        <a:t>HI設定中に BtnA → LO設定に切替（HI値確定）</a:t>
+                      </a:r>
+                    </a:p>
+                  </a:txBody>
+                  <a:tcPr>
+                    <a:solidFill>
+                      <a:srgbClr val="FFFFFF"/>
+                    </a:solidFill>
+                  </a:tcPr>
+                </a:tc>
               </a:tr>
-              <a:tr h="502920">
-                <a:tc>
-                  <a:txBody>
-                    <a:bodyPr wrap="square"/>
-                    <a:lstStyle/>
-                    <a:p>
-                      <a:pPr algn="l"/>
-                      <a:r>
-                        <a:rPr sz="1400" b="0">
+              <a:tr h="475488">
+                <a:tc>
+                  <a:txBody>
+                    <a:bodyPr wrap="square"/>
+                    <a:lstStyle/>
+                    <a:p>
+                      <a:pPr algn="l"/>
+                      <a:r>
+                        <a:rPr sz="1300" b="0">
                           <a:solidFill>
                             <a:srgbClr val="1A1A2E"/>
                           </a:solidFill>
                           <a:latin typeface="游ゴシック"/>
                         </a:rPr>
-                        <a:t>④ 保存・戻る</a:t>
+                        <a:t>④ LO温度を調整</a:t>
                       </a:r>
                     </a:p>
                   </a:txBody>
@@ -20547,19 +21345,113 @@
                     <a:p>
                       <a:pPr algn="l"/>
                       <a:r>
-                        <a:rPr sz="1400" b="0">
+                        <a:rPr sz="1300" b="0">
                           <a:solidFill>
                             <a:srgbClr val="1A1A2E"/>
                           </a:solidFill>
                           <a:latin typeface="游ゴシック"/>
                         </a:rPr>
-                        <a:t>設定完了後に長押し → EEPROMへ書き込み → IDLE画面に戻る</a:t>
+                        <a:t>BtnB/C</a:t>
                       </a:r>
                     </a:p>
                   </a:txBody>
                   <a:tcPr>
                     <a:solidFill>
                       <a:srgbClr val="E8EEF4"/>
+                    </a:solidFill>
+                  </a:tcPr>
+                </a:tc>
+                <a:tc>
+                  <a:txBody>
+                    <a:bodyPr wrap="square"/>
+                    <a:lstStyle/>
+                    <a:p>
+                      <a:pPr algn="l"/>
+                      <a:r>
+                        <a:rPr sz="1300" b="0">
+                          <a:solidFill>
+                            <a:srgbClr val="1A1A2E"/>
+                          </a:solidFill>
+                          <a:latin typeface="游ゴシック"/>
+                        </a:rPr>
+                        <a:t>BtnB : LO設定値を +5℃  /  BtnC : LO設定値を −5℃</a:t>
+                      </a:r>
+                    </a:p>
+                  </a:txBody>
+                  <a:tcPr>
+                    <a:solidFill>
+                      <a:srgbClr val="E8EEF4"/>
+                    </a:solidFill>
+                  </a:tcPr>
+                </a:tc>
+              </a:tr>
+              <a:tr h="475488">
+                <a:tc>
+                  <a:txBody>
+                    <a:bodyPr wrap="square"/>
+                    <a:lstStyle/>
+                    <a:p>
+                      <a:pPr algn="l"/>
+                      <a:r>
+                        <a:rPr sz="1300" b="0">
+                          <a:solidFill>
+                            <a:srgbClr val="1A1A2E"/>
+                          </a:solidFill>
+                          <a:latin typeface="游ゴシック"/>
+                        </a:rPr>
+                        <a:t>⑤ 保存・終了</a:t>
+                      </a:r>
+                    </a:p>
+                  </a:txBody>
+                  <a:tcPr>
+                    <a:solidFill>
+                      <a:srgbClr val="FFFFFF"/>
+                    </a:solidFill>
+                  </a:tcPr>
+                </a:tc>
+                <a:tc>
+                  <a:txBody>
+                    <a:bodyPr wrap="square"/>
+                    <a:lstStyle/>
+                    <a:p>
+                      <a:pPr algn="l"/>
+                      <a:r>
+                        <a:rPr sz="1300" b="0">
+                          <a:solidFill>
+                            <a:srgbClr val="1A1A2E"/>
+                          </a:solidFill>
+                          <a:latin typeface="游ゴシック"/>
+                        </a:rPr>
+                        <a:t>BtnA</a:t>
+                      </a:r>
+                    </a:p>
+                  </a:txBody>
+                  <a:tcPr>
+                    <a:solidFill>
+                      <a:srgbClr val="FFFFFF"/>
+                    </a:solidFill>
+                  </a:tcPr>
+                </a:tc>
+                <a:tc>
+                  <a:txBody>
+                    <a:bodyPr wrap="square"/>
+                    <a:lstStyle/>
+                    <a:p>
+                      <a:pPr algn="l"/>
+                      <a:r>
+                        <a:rPr sz="1300" b="0">
+                          <a:solidFill>
+                            <a:srgbClr val="1A1A2E"/>
+                          </a:solidFill>
+                          <a:latin typeface="游ゴシック"/>
+                        </a:rPr>
+                        <a:t>LO設定中に BtnA → EEPROM保存 → アラームフラグリセット → IDLE に戻る</a:t>
+                      </a:r>
+                    </a:p>
+                  </a:txBody>
+                  <a:tcPr>
+                    <a:solidFill>
+                      <a:srgbClr val="FFFFFF"/>
                     </a:solidFill>
                   </a:tcPr>
                 </a:tc>
@@ -20576,8 +21468,8 @@
         </p:nvSpPr>
         <p:spPr>
           <a:xfrm>
-            <a:off x="320040" y="4251960"/>
-            <a:ext cx="10972800" cy="411480"/>
+            <a:off x="320040" y="4434840"/>
+            <a:ext cx="10972800" cy="384048"/>
           </a:xfrm>
           <a:prstGeom prst="rect">
             <a:avLst/>
@@ -20592,7 +21484,7 @@
           <a:p>
             <a:pPr algn="l"/>
             <a:r>
-              <a:rPr sz="1700" b="1" i="0">
+              <a:rPr sz="1600" b="1" i="0">
                 <a:solidFill>
                   <a:srgbClr val="0D2B45"/>
                 </a:solidFill>
@@ -20612,8 +21504,8 @@
           <p:nvPr/>
         </p:nvGraphicFramePr>
         <p:xfrm>
-          <a:off x="320040" y="4709160"/>
-          <a:ext cx="11521440" cy="1645920"/>
+          <a:off x="320040" y="4892040"/>
+          <a:ext cx="11521440" cy="2011680"/>
         </p:xfrm>
         <a:graphic>
           <a:graphicData uri="http://schemas.openxmlformats.org/drawingml/2006/table">
@@ -20622,19 +21514,20 @@
                 <a:tableStyleId>{5C22544A-7EE6-4342-B048-85BDC9FD1C3A}</a:tableStyleId>
               </a:tblPr>
               <a:tblGrid>
-                <a:gridCol w="2743200"/>
-                <a:gridCol w="4572000"/>
-                <a:gridCol w="4206240"/>
+                <a:gridCol w="2468880"/>
+                <a:gridCol w="2560320"/>
+                <a:gridCol w="2651760"/>
+                <a:gridCol w="3840480"/>
               </a:tblGrid>
-              <a:tr h="411480">
-                <a:tc>
-                  <a:txBody>
-                    <a:bodyPr wrap="square"/>
-                    <a:lstStyle/>
-                    <a:p>
-                      <a:pPr algn="l"/>
-                      <a:r>
-                        <a:rPr sz="1300" b="1">
+              <a:tr h="402336">
+                <a:tc>
+                  <a:txBody>
+                    <a:bodyPr wrap="square"/>
+                    <a:lstStyle/>
+                    <a:p>
+                      <a:pPr algn="l"/>
+                      <a:r>
+                        <a:rPr sz="1200" b="1">
                           <a:solidFill>
                             <a:srgbClr val="FFFFFF"/>
                           </a:solidFill>
@@ -20657,13 +21550,13 @@
                     <a:p>
                       <a:pPr algn="l"/>
                       <a:r>
-                        <a:rPr sz="1300" b="1">
+                        <a:rPr sz="1200" b="1">
                           <a:solidFill>
                             <a:srgbClr val="FFFFFF"/>
                           </a:solidFill>
                           <a:latin typeface="游ゴシック"/>
                         </a:rPr>
-                        <a:t>表示</a:t>
+                        <a:t>画面表示</a:t>
                       </a:r>
                     </a:p>
                   </a:txBody>
@@ -20680,12 +21573,35 @@
                     <a:p>
                       <a:pPr algn="l"/>
                       <a:r>
-                        <a:rPr sz="1300" b="1">
+                        <a:rPr sz="1200" b="1">
                           <a:solidFill>
                             <a:srgbClr val="FFFFFF"/>
                           </a:solidFill>
                           <a:latin typeface="游ゴシック"/>
                         </a:rPr>
+                        <a:t>スピーカー</a:t>
+                      </a:r>
+                    </a:p>
+                  </a:txBody>
+                  <a:tcPr>
+                    <a:solidFill>
+                      <a:srgbClr val="0D2B45"/>
+                    </a:solidFill>
+                  </a:tcPr>
+                </a:tc>
+                <a:tc>
+                  <a:txBody>
+                    <a:bodyPr wrap="square"/>
+                    <a:lstStyle/>
+                    <a:p>
+                      <a:pPr algn="l"/>
+                      <a:r>
+                        <a:rPr sz="1200" b="1">
+                          <a:solidFill>
+                            <a:srgbClr val="FFFFFF"/>
+                          </a:solidFill>
+                          <a:latin typeface="游ゴシック"/>
+                        </a:rPr>
                         <a:t>CSVへの記録</a:t>
                       </a:r>
                     </a:p>
@@ -20697,15 +21613,15 @@
                   </a:tcPr>
                 </a:tc>
               </a:tr>
-              <a:tr h="411480">
-                <a:tc>
-                  <a:txBody>
-                    <a:bodyPr wrap="square"/>
-                    <a:lstStyle/>
-                    <a:p>
-                      <a:pPr algn="l"/>
-                      <a:r>
-                        <a:rPr sz="1300" b="0">
+              <a:tr h="402336">
+                <a:tc>
+                  <a:txBody>
+                    <a:bodyPr wrap="square"/>
+                    <a:lstStyle/>
+                    <a:p>
+                      <a:pPr algn="l"/>
+                      <a:r>
+                        <a:rPr sz="1200" b="0">
                           <a:solidFill>
                             <a:srgbClr val="1A1A2E"/>
                           </a:solidFill>
@@ -20728,13 +21644,13 @@
                     <a:p>
                       <a:pPr algn="l"/>
                       <a:r>
-                        <a:rPr sz="1300" b="0">
+                        <a:rPr sz="1200" b="0">
                           <a:solidFill>
                             <a:srgbClr val="1A1A2E"/>
                           </a:solidFill>
                           <a:latin typeface="游ゴシック"/>
                         </a:rPr>
-                        <a:t>画面上部が赤色点滅表示</a:t>
+                        <a:t>温度を赤色（RED）で表示</a:t>
                       </a:r>
                     </a:p>
                   </a:txBody>
@@ -20751,13 +21667,13 @@
                     <a:p>
                       <a:pPr algn="l"/>
                       <a:r>
-                        <a:rPr sz="1300" b="0">
+                        <a:rPr sz="1200" b="0">
                           <a:solidFill>
                             <a:srgbClr val="1A1A2E"/>
                           </a:solidFill>
                           <a:latin typeface="游ゴシック"/>
                         </a:rPr>
-                        <a:t>AL_HI フラグが該当行に記録</a:t>
+                        <a:t>2kHz ビープ音（500ms）</a:t>
                       </a:r>
                     </a:p>
                   </a:txBody>
@@ -20767,16 +21683,39 @@
                     </a:solidFill>
                   </a:tcPr>
                 </a:tc>
+                <a:tc>
+                  <a:txBody>
+                    <a:bodyPr wrap="square"/>
+                    <a:lstStyle/>
+                    <a:p>
+                      <a:pPr algn="l"/>
+                      <a:r>
+                        <a:rPr sz="1200" b="0">
+                          <a:solidFill>
+                            <a:srgbClr val="1A1A2E"/>
+                          </a:solidFill>
+                          <a:latin typeface="游ゴシック"/>
+                        </a:rPr>
+                        <a:t>HI_ALARM 列が 1（true）</a:t>
+                      </a:r>
+                    </a:p>
+                  </a:txBody>
+                  <a:tcPr>
+                    <a:solidFill>
+                      <a:srgbClr val="FFFFFF"/>
+                    </a:solidFill>
+                  </a:tcPr>
+                </a:tc>
               </a:tr>
-              <a:tr h="411480">
-                <a:tc>
-                  <a:txBody>
-                    <a:bodyPr wrap="square"/>
-                    <a:lstStyle/>
-                    <a:p>
-                      <a:pPr algn="l"/>
-                      <a:r>
-                        <a:rPr sz="1300" b="0">
+              <a:tr h="402336">
+                <a:tc>
+                  <a:txBody>
+                    <a:bodyPr wrap="square"/>
+                    <a:lstStyle/>
+                    <a:p>
+                      <a:pPr algn="l"/>
+                      <a:r>
+                        <a:rPr sz="1200" b="0">
                           <a:solidFill>
                             <a:srgbClr val="1A1A2E"/>
                           </a:solidFill>
@@ -20799,13 +21738,13 @@
                     <a:p>
                       <a:pPr algn="l"/>
                       <a:r>
-                        <a:rPr sz="1300" b="0">
+                        <a:rPr sz="1200" b="0">
                           <a:solidFill>
                             <a:srgbClr val="1A1A2E"/>
                           </a:solidFill>
                           <a:latin typeface="游ゴシック"/>
                         </a:rPr>
-                        <a:t>画面下部が青色点滅表示</a:t>
+                        <a:t>温度を赤色（RED）で表示</a:t>
                       </a:r>
                     </a:p>
                   </a:txBody>
@@ -20822,13 +21761,13 @@
                     <a:p>
                       <a:pPr algn="l"/>
                       <a:r>
-                        <a:rPr sz="1300" b="0">
+                        <a:rPr sz="1200" b="0">
                           <a:solidFill>
                             <a:srgbClr val="1A1A2E"/>
                           </a:solidFill>
                           <a:latin typeface="游ゴシック"/>
                         </a:rPr>
-                        <a:t>AL_LO フラグが該当行に記録</a:t>
+                        <a:t>1kHz ビープ音（500ms）</a:t>
                       </a:r>
                     </a:p>
                   </a:txBody>
@@ -20838,74 +21777,214 @@
                     </a:solidFill>
                   </a:tcPr>
                 </a:tc>
+                <a:tc>
+                  <a:txBody>
+                    <a:bodyPr wrap="square"/>
+                    <a:lstStyle/>
+                    <a:p>
+                      <a:pPr algn="l"/>
+                      <a:r>
+                        <a:rPr sz="1200" b="0">
+                          <a:solidFill>
+                            <a:srgbClr val="1A1A2E"/>
+                          </a:solidFill>
+                          <a:latin typeface="游ゴシック"/>
+                        </a:rPr>
+                        <a:t>LO_ALARM 列が 1（true）</a:t>
+                      </a:r>
+                    </a:p>
+                  </a:txBody>
+                  <a:tcPr>
+                    <a:solidFill>
+                      <a:srgbClr val="E8EEF4"/>
+                    </a:solidFill>
+                  </a:tcPr>
+                </a:tc>
               </a:tr>
-              <a:tr h="411480">
-                <a:tc>
-                  <a:txBody>
-                    <a:bodyPr wrap="square"/>
-                    <a:lstStyle/>
-                    <a:p>
-                      <a:pPr algn="l"/>
-                      <a:r>
-                        <a:rPr sz="1300" b="0">
+              <a:tr h="402336">
+                <a:tc>
+                  <a:txBody>
+                    <a:bodyPr wrap="square"/>
+                    <a:lstStyle/>
+                    <a:p>
+                      <a:pPr algn="l"/>
+                      <a:r>
+                        <a:rPr sz="1200" b="0">
                           <a:solidFill>
                             <a:srgbClr val="1A1A2E"/>
                           </a:solidFill>
                           <a:latin typeface="游ゴシック"/>
                         </a:rPr>
+                        <a:t>閾値に近い（ヒステリシス内）</a:t>
+                      </a:r>
+                    </a:p>
+                  </a:txBody>
+                  <a:tcPr>
+                    <a:solidFill>
+                      <a:srgbClr val="FFFFFF"/>
+                    </a:solidFill>
+                  </a:tcPr>
+                </a:tc>
+                <a:tc>
+                  <a:txBody>
+                    <a:bodyPr wrap="square"/>
+                    <a:lstStyle/>
+                    <a:p>
+                      <a:pPr algn="l"/>
+                      <a:r>
+                        <a:rPr sz="1200" b="0">
+                          <a:solidFill>
+                            <a:srgbClr val="1A1A2E"/>
+                          </a:solidFill>
+                          <a:latin typeface="游ゴシック"/>
+                        </a:rPr>
+                        <a:t>赤色のまま（クリアされない）</a:t>
+                      </a:r>
+                    </a:p>
+                  </a:txBody>
+                  <a:tcPr>
+                    <a:solidFill>
+                      <a:srgbClr val="FFFFFF"/>
+                    </a:solidFill>
+                  </a:tcPr>
+                </a:tc>
+                <a:tc>
+                  <a:txBody>
+                    <a:bodyPr wrap="square"/>
+                    <a:lstStyle/>
+                    <a:p>
+                      <a:pPr algn="l"/>
+                      <a:r>
+                        <a:rPr sz="1200" b="0">
+                          <a:solidFill>
+                            <a:srgbClr val="1A1A2E"/>
+                          </a:solidFill>
+                          <a:latin typeface="游ゴシック"/>
+                        </a:rPr>
+                        <a:t>発報なし（継続監視）</a:t>
+                      </a:r>
+                    </a:p>
+                  </a:txBody>
+                  <a:tcPr>
+                    <a:solidFill>
+                      <a:srgbClr val="FFFFFF"/>
+                    </a:solidFill>
+                  </a:tcPr>
+                </a:tc>
+                <a:tc>
+                  <a:txBody>
+                    <a:bodyPr wrap="square"/>
+                    <a:lstStyle/>
+                    <a:p>
+                      <a:pPr algn="l"/>
+                      <a:r>
+                        <a:rPr sz="1200" b="0">
+                          <a:solidFill>
+                            <a:srgbClr val="1A1A2E"/>
+                          </a:solidFill>
+                          <a:latin typeface="游ゴシック"/>
+                        </a:rPr>
+                        <a:t>フラグ継続</a:t>
+                      </a:r>
+                    </a:p>
+                  </a:txBody>
+                  <a:tcPr>
+                    <a:solidFill>
+                      <a:srgbClr val="FFFFFF"/>
+                    </a:solidFill>
+                  </a:tcPr>
+                </a:tc>
+              </a:tr>
+              <a:tr h="402336">
+                <a:tc>
+                  <a:txBody>
+                    <a:bodyPr wrap="square"/>
+                    <a:lstStyle/>
+                    <a:p>
+                      <a:pPr algn="l"/>
+                      <a:r>
+                        <a:rPr sz="1200" b="0">
+                          <a:solidFill>
+                            <a:srgbClr val="1A1A2E"/>
+                          </a:solidFill>
+                          <a:latin typeface="游ゴシック"/>
+                        </a:rPr>
                         <a:t>通常範囲</a:t>
                       </a:r>
                     </a:p>
                   </a:txBody>
                   <a:tcPr>
                     <a:solidFill>
-                      <a:srgbClr val="FFFFFF"/>
-                    </a:solidFill>
-                  </a:tcPr>
-                </a:tc>
-                <a:tc>
-                  <a:txBody>
-                    <a:bodyPr wrap="square"/>
-                    <a:lstStyle/>
-                    <a:p>
-                      <a:pPr algn="l"/>
-                      <a:r>
-                        <a:rPr sz="1300" b="0">
+                      <a:srgbClr val="E8EEF4"/>
+                    </a:solidFill>
+                  </a:tcPr>
+                </a:tc>
+                <a:tc>
+                  <a:txBody>
+                    <a:bodyPr wrap="square"/>
+                    <a:lstStyle/>
+                    <a:p>
+                      <a:pPr algn="l"/>
+                      <a:r>
+                        <a:rPr sz="1200" b="0">
                           <a:solidFill>
                             <a:srgbClr val="1A1A2E"/>
                           </a:solidFill>
                           <a:latin typeface="游ゴシック"/>
                         </a:rPr>
-                        <a:t>通常の白色表示</a:t>
-                      </a:r>
-                    </a:p>
-                  </a:txBody>
-                  <a:tcPr>
-                    <a:solidFill>
-                      <a:srgbClr val="FFFFFF"/>
-                    </a:solidFill>
-                  </a:tcPr>
-                </a:tc>
-                <a:tc>
-                  <a:txBody>
-                    <a:bodyPr wrap="square"/>
-                    <a:lstStyle/>
-                    <a:p>
-                      <a:pPr algn="l"/>
-                      <a:r>
-                        <a:rPr sz="1300" b="0">
+                        <a:t>白色（WHITE）で表示</a:t>
+                      </a:r>
+                    </a:p>
+                  </a:txBody>
+                  <a:tcPr>
+                    <a:solidFill>
+                      <a:srgbClr val="E8EEF4"/>
+                    </a:solidFill>
+                  </a:tcPr>
+                </a:tc>
+                <a:tc>
+                  <a:txBody>
+                    <a:bodyPr wrap="square"/>
+                    <a:lstStyle/>
+                    <a:p>
+                      <a:pPr algn="l"/>
+                      <a:r>
+                        <a:rPr sz="1200" b="0">
                           <a:solidFill>
                             <a:srgbClr val="1A1A2E"/>
                           </a:solidFill>
                           <a:latin typeface="游ゴシック"/>
                         </a:rPr>
-                        <a:t>フラグなし</a:t>
-                      </a:r>
-                    </a:p>
-                  </a:txBody>
-                  <a:tcPr>
-                    <a:solidFill>
-                      <a:srgbClr val="FFFFFF"/>
+                        <a:t>なし</a:t>
+                      </a:r>
+                    </a:p>
+                  </a:txBody>
+                  <a:tcPr>
+                    <a:solidFill>
+                      <a:srgbClr val="E8EEF4"/>
+                    </a:solidFill>
+                  </a:tcPr>
+                </a:tc>
+                <a:tc>
+                  <a:txBody>
+                    <a:bodyPr wrap="square"/>
+                    <a:lstStyle/>
+                    <a:p>
+                      <a:pPr algn="l"/>
+                      <a:r>
+                        <a:rPr sz="1200" b="0">
+                          <a:solidFill>
+                            <a:srgbClr val="1A1A2E"/>
+                          </a:solidFill>
+                          <a:latin typeface="游ゴシック"/>
+                        </a:rPr>
+                        <a:t>HI_ALARM / LO_ALARM = 0</a:t>
+                      </a:r>
+                    </a:p>
+                  </a:txBody>
+                  <a:tcPr>
+                    <a:solidFill>
+                      <a:srgbClr val="E8EEF4"/>
                     </a:solidFill>
                   </a:tcPr>
                 </a:tc>
@@ -20914,6 +21993,41 @@
           </a:graphicData>
         </a:graphic>
       </p:graphicFrame>
+      <p:sp>
+        <p:nvSpPr>
+          <p:cNvPr id="14" name="TextBox 13"/>
+          <p:cNvSpPr txBox="1"/>
+          <p:nvPr/>
+        </p:nvSpPr>
+        <p:spPr>
+          <a:xfrm>
+            <a:off x="320040" y="6446520"/>
+            <a:ext cx="11430000" cy="384048"/>
+          </a:xfrm>
+          <a:prstGeom prst="rect">
+            <a:avLst/>
+          </a:prstGeom>
+          <a:noFill/>
+        </p:spPr>
+        <p:txBody>
+          <a:bodyPr wrap="square">
+            <a:spAutoFit/>
+          </a:bodyPr>
+          <a:lstStyle/>
+          <a:p>
+            <a:pPr algn="l"/>
+            <a:r>
+              <a:rPr sz="1300" b="0" i="0">
+                <a:solidFill>
+                  <a:srgbClr val="0D2B45"/>
+                </a:solidFill>
+                <a:latin typeface="游ゴシック"/>
+              </a:rPr>
+              <a:t>💡  デフォルト設定 HI = 600℃ / LO = 400℃  /  ヒステリシス幅 = ±5℃（チラつき防止）</a:t>
+            </a:r>
+          </a:p>
+        </p:txBody>
+      </p:sp>
     </p:spTree>
   </p:cSld>
   <p:clrMapOvr>
@@ -21253,7 +22367,7 @@
         <p:spPr>
           <a:xfrm>
             <a:off x="320040" y="1097280"/>
-            <a:ext cx="5943600" cy="411480"/>
+            <a:ext cx="11430000" cy="384048"/>
           </a:xfrm>
           <a:prstGeom prst="rect">
             <a:avLst/>
@@ -21274,22 +22388,57 @@
                 </a:solidFill>
                 <a:latin typeface="游ゴシック"/>
               </a:rPr>
-              <a:t>CSV ファイルのフォーマット</a:t>
+              <a:t>CSV ファイルのフォーマット（全10列）</a:t>
+            </a:r>
+          </a:p>
+        </p:txBody>
+      </p:sp>
+      <p:sp>
+        <p:nvSpPr>
+          <p:cNvPr id="11" name="TextBox 10"/>
+          <p:cNvSpPr txBox="1"/>
+          <p:nvPr/>
+        </p:nvSpPr>
+        <p:spPr>
+          <a:xfrm>
+            <a:off x="320040" y="1508760"/>
+            <a:ext cx="11430000" cy="320040"/>
+          </a:xfrm>
+          <a:prstGeom prst="rect">
+            <a:avLst/>
+          </a:prstGeom>
+          <a:noFill/>
+        </p:spPr>
+        <p:txBody>
+          <a:bodyPr wrap="square">
+            <a:spAutoFit/>
+          </a:bodyPr>
+          <a:lstStyle/>
+          <a:p>
+            <a:pPr algn="l"/>
+            <a:r>
+              <a:rPr sz="1100" b="0" i="1">
+                <a:solidFill>
+                  <a:srgbClr val="8899AA"/>
+                </a:solidFill>
+                <a:latin typeface="游ゴシック"/>
+              </a:rPr>
+              <a:t>ヘッダ行:  ElapsedSec, Temp_C, State, Samples, Average_C, StdDev_C, Max_C, Min_C, HI_ALARM, LO_ALARM</a:t>
             </a:r>
           </a:p>
         </p:txBody>
       </p:sp>
       <p:graphicFrame>
         <p:nvGraphicFramePr>
-          <p:cNvPr id="11" name="Table 10"/>
+          <p:cNvPr id="12" name="Table 11"/>
           <p:cNvGraphicFramePr>
             <a:graphicFrameLocks noGrp="1"/>
           </p:cNvGraphicFramePr>
           <p:nvPr/>
         </p:nvGraphicFramePr>
         <p:xfrm>
-          <a:off x="320040" y="1600200"/>
-          <a:ext cx="5943600" cy="2880360"/>
+          <a:off x="320040" y="1920240"/>
+          <a:ext cx="7132320" cy="4425696"/>
         </p:xfrm>
         <a:graphic>
           <a:graphicData uri="http://schemas.openxmlformats.org/drawingml/2006/table">
@@ -21298,19 +22447,19 @@
                 <a:tableStyleId>{5C22544A-7EE6-4342-B048-85BDC9FD1C3A}</a:tableStyleId>
               </a:tblPr>
               <a:tblGrid>
-                <a:gridCol w="1828800"/>
-                <a:gridCol w="2560320"/>
-                <a:gridCol w="1554480"/>
+                <a:gridCol w="1737360"/>
+                <a:gridCol w="3474720"/>
+                <a:gridCol w="1920240"/>
               </a:tblGrid>
-              <a:tr h="411480">
-                <a:tc>
-                  <a:txBody>
-                    <a:bodyPr wrap="square"/>
-                    <a:lstStyle/>
-                    <a:p>
-                      <a:pPr algn="l"/>
-                      <a:r>
-                        <a:rPr sz="1300" b="1">
+              <a:tr h="402336">
+                <a:tc>
+                  <a:txBody>
+                    <a:bodyPr wrap="square"/>
+                    <a:lstStyle/>
+                    <a:p>
+                      <a:pPr algn="l"/>
+                      <a:r>
+                        <a:rPr sz="1200" b="1">
                           <a:solidFill>
                             <a:srgbClr val="FFFFFF"/>
                           </a:solidFill>
@@ -21333,7 +22482,7 @@
                     <a:p>
                       <a:pPr algn="l"/>
                       <a:r>
-                        <a:rPr sz="1300" b="1">
+                        <a:rPr sz="1200" b="1">
                           <a:solidFill>
                             <a:srgbClr val="FFFFFF"/>
                           </a:solidFill>
@@ -21356,7 +22505,7 @@
                     <a:p>
                       <a:pPr algn="l"/>
                       <a:r>
-                        <a:rPr sz="1300" b="1">
+                        <a:rPr sz="1200" b="1">
                           <a:solidFill>
                             <a:srgbClr val="FFFFFF"/>
                           </a:solidFill>
@@ -21373,21 +22522,21 @@
                   </a:tcPr>
                 </a:tc>
               </a:tr>
-              <a:tr h="411480">
-                <a:tc>
-                  <a:txBody>
-                    <a:bodyPr wrap="square"/>
-                    <a:lstStyle/>
-                    <a:p>
-                      <a:pPr algn="l"/>
-                      <a:r>
-                        <a:rPr sz="1300" b="0">
+              <a:tr h="402336">
+                <a:tc>
+                  <a:txBody>
+                    <a:bodyPr wrap="square"/>
+                    <a:lstStyle/>
+                    <a:p>
+                      <a:pPr algn="l"/>
+                      <a:r>
+                        <a:rPr sz="1200" b="0">
                           <a:solidFill>
                             <a:srgbClr val="1A1A2E"/>
                           </a:solidFill>
                           <a:latin typeface="游ゴシック"/>
                         </a:rPr>
-                        <a:t>Count</a:t>
+                        <a:t>ElapsedSec</a:t>
                       </a:r>
                     </a:p>
                   </a:txBody>
@@ -21404,13 +22553,13 @@
                     <a:p>
                       <a:pPr algn="l"/>
                       <a:r>
-                        <a:rPr sz="1300" b="0">
+                        <a:rPr sz="1200" b="0">
                           <a:solidFill>
                             <a:srgbClr val="1A1A2E"/>
                           </a:solidFill>
                           <a:latin typeface="游ゴシック"/>
                         </a:rPr>
-                        <a:t>計測サンプル番号</a:t>
+                        <a:t>RUN開始からの経過時間（秒）</a:t>
                       </a:r>
                     </a:p>
                   </a:txBody>
@@ -21427,13 +22576,13 @@
                     <a:p>
                       <a:pPr algn="l"/>
                       <a:r>
-                        <a:rPr sz="1300" b="0">
+                        <a:rPr sz="1200" b="0">
                           <a:solidFill>
                             <a:srgbClr val="1A1A2E"/>
                           </a:solidFill>
                           <a:latin typeface="游ゴシック"/>
                         </a:rPr>
-                        <a:t>1, 2, 3 …</a:t>
+                        <a:t>0, 10, 20 …</a:t>
                       </a:r>
                     </a:p>
                   </a:txBody>
@@ -21444,15 +22593,15 @@
                   </a:tcPr>
                 </a:tc>
               </a:tr>
-              <a:tr h="411480">
-                <a:tc>
-                  <a:txBody>
-                    <a:bodyPr wrap="square"/>
-                    <a:lstStyle/>
-                    <a:p>
-                      <a:pPr algn="l"/>
-                      <a:r>
-                        <a:rPr sz="1300" b="0">
+              <a:tr h="402336">
+                <a:tc>
+                  <a:txBody>
+                    <a:bodyPr wrap="square"/>
+                    <a:lstStyle/>
+                    <a:p>
+                      <a:pPr algn="l"/>
+                      <a:r>
+                        <a:rPr sz="1200" b="0">
                           <a:solidFill>
                             <a:srgbClr val="1A1A2E"/>
                           </a:solidFill>
@@ -21475,13 +22624,13 @@
                     <a:p>
                       <a:pPr algn="l"/>
                       <a:r>
-                        <a:rPr sz="1300" b="0">
+                        <a:rPr sz="1200" b="0">
                           <a:solidFill>
                             <a:srgbClr val="1A1A2E"/>
                           </a:solidFill>
                           <a:latin typeface="游ゴシック"/>
                         </a:rPr>
-                        <a:t>計測温度（℃）</a:t>
+                        <a:t>LPFフィルタ後の計測温度（℃）</a:t>
                       </a:r>
                     </a:p>
                   </a:txBody>
@@ -21498,7 +22647,7 @@
                     <a:p>
                       <a:pPr algn="l"/>
                       <a:r>
-                        <a:rPr sz="1300" b="0">
+                        <a:rPr sz="1200" b="0">
                           <a:solidFill>
                             <a:srgbClr val="1A1A2E"/>
                           </a:solidFill>
@@ -21515,20 +22664,162 @@
                   </a:tcPr>
                 </a:tc>
               </a:tr>
-              <a:tr h="411480">
-                <a:tc>
-                  <a:txBody>
-                    <a:bodyPr wrap="square"/>
-                    <a:lstStyle/>
-                    <a:p>
-                      <a:pPr algn="l"/>
-                      <a:r>
-                        <a:rPr sz="1300" b="0">
+              <a:tr h="402336">
+                <a:tc>
+                  <a:txBody>
+                    <a:bodyPr wrap="square"/>
+                    <a:lstStyle/>
+                    <a:p>
+                      <a:pPr algn="l"/>
+                      <a:r>
+                        <a:rPr sz="1200" b="0">
                           <a:solidFill>
                             <a:srgbClr val="1A1A2E"/>
                           </a:solidFill>
                           <a:latin typeface="游ゴシック"/>
                         </a:rPr>
+                        <a:t>State</a:t>
+                      </a:r>
+                    </a:p>
+                  </a:txBody>
+                  <a:tcPr>
+                    <a:solidFill>
+                      <a:srgbClr val="FFFFFF"/>
+                    </a:solidFill>
+                  </a:tcPr>
+                </a:tc>
+                <a:tc>
+                  <a:txBody>
+                    <a:bodyPr wrap="square"/>
+                    <a:lstStyle/>
+                    <a:p>
+                      <a:pPr algn="l"/>
+                      <a:r>
+                        <a:rPr sz="1200" b="0">
+                          <a:solidFill>
+                            <a:srgbClr val="1A1A2E"/>
+                          </a:solidFill>
+                          <a:latin typeface="游ゴシック"/>
+                        </a:rPr>
+                        <a:t>計測中の状態名</a:t>
+                      </a:r>
+                    </a:p>
+                  </a:txBody>
+                  <a:tcPr>
+                    <a:solidFill>
+                      <a:srgbClr val="FFFFFF"/>
+                    </a:solidFill>
+                  </a:tcPr>
+                </a:tc>
+                <a:tc>
+                  <a:txBody>
+                    <a:bodyPr wrap="square"/>
+                    <a:lstStyle/>
+                    <a:p>
+                      <a:pPr algn="l"/>
+                      <a:r>
+                        <a:rPr sz="1200" b="0">
+                          <a:solidFill>
+                            <a:srgbClr val="1A1A2E"/>
+                          </a:solidFill>
+                          <a:latin typeface="游ゴシック"/>
+                        </a:rPr>
+                        <a:t>RUN</a:t>
+                      </a:r>
+                    </a:p>
+                  </a:txBody>
+                  <a:tcPr>
+                    <a:solidFill>
+                      <a:srgbClr val="FFFFFF"/>
+                    </a:solidFill>
+                  </a:tcPr>
+                </a:tc>
+              </a:tr>
+              <a:tr h="402336">
+                <a:tc>
+                  <a:txBody>
+                    <a:bodyPr wrap="square"/>
+                    <a:lstStyle/>
+                    <a:p>
+                      <a:pPr algn="l"/>
+                      <a:r>
+                        <a:rPr sz="1200" b="0">
+                          <a:solidFill>
+                            <a:srgbClr val="1A1A2E"/>
+                          </a:solidFill>
+                          <a:latin typeface="游ゴシック"/>
+                        </a:rPr>
+                        <a:t>Samples</a:t>
+                      </a:r>
+                    </a:p>
+                  </a:txBody>
+                  <a:tcPr>
+                    <a:solidFill>
+                      <a:srgbClr val="E8EEF4"/>
+                    </a:solidFill>
+                  </a:tcPr>
+                </a:tc>
+                <a:tc>
+                  <a:txBody>
+                    <a:bodyPr wrap="square"/>
+                    <a:lstStyle/>
+                    <a:p>
+                      <a:pPr algn="l"/>
+                      <a:r>
+                        <a:rPr sz="1200" b="0">
+                          <a:solidFill>
+                            <a:srgbClr val="1A1A2E"/>
+                          </a:solidFill>
+                          <a:latin typeface="游ゴシック"/>
+                        </a:rPr>
+                        <a:t>累積サンプル数（Welford のカウント）</a:t>
+                      </a:r>
+                    </a:p>
+                  </a:txBody>
+                  <a:tcPr>
+                    <a:solidFill>
+                      <a:srgbClr val="E8EEF4"/>
+                    </a:solidFill>
+                  </a:tcPr>
+                </a:tc>
+                <a:tc>
+                  <a:txBody>
+                    <a:bodyPr wrap="square"/>
+                    <a:lstStyle/>
+                    <a:p>
+                      <a:pPr algn="l"/>
+                      <a:r>
+                        <a:rPr sz="1200" b="0">
+                          <a:solidFill>
+                            <a:srgbClr val="1A1A2E"/>
+                          </a:solidFill>
+                          <a:latin typeface="游ゴシック"/>
+                        </a:rPr>
+                        <a:t>14</a:t>
+                      </a:r>
+                    </a:p>
+                  </a:txBody>
+                  <a:tcPr>
+                    <a:solidFill>
+                      <a:srgbClr val="E8EEF4"/>
+                    </a:solidFill>
+                  </a:tcPr>
+                </a:tc>
+              </a:tr>
+              <a:tr h="402336">
+                <a:tc>
+                  <a:txBody>
+                    <a:bodyPr wrap="square"/>
+                    <a:lstStyle/>
+                    <a:p>
+                      <a:pPr algn="l"/>
+                      <a:r>
+                        <a:rPr sz="1200" b="0">
+                          <a:solidFill>
+                            <a:srgbClr val="1A1A2E"/>
+                          </a:solidFill>
+                          <a:latin typeface="游ゴシック"/>
+                        </a:rPr>
                         <a:t>Average_C</a:t>
                       </a:r>
                     </a:p>
@@ -21546,7 +22837,7 @@
                     <a:p>
                       <a:pPr algn="l"/>
                       <a:r>
-                        <a:rPr sz="1300" b="0">
+                        <a:rPr sz="1200" b="0">
                           <a:solidFill>
                             <a:srgbClr val="1A1A2E"/>
                           </a:solidFill>
@@ -21569,7 +22860,7 @@
                     <a:p>
                       <a:pPr algn="l"/>
                       <a:r>
-                        <a:rPr sz="1300" b="0">
+                        <a:rPr sz="1200" b="0">
                           <a:solidFill>
                             <a:srgbClr val="1A1A2E"/>
                           </a:solidFill>
@@ -21586,15 +22877,15 @@
                   </a:tcPr>
                 </a:tc>
               </a:tr>
-              <a:tr h="411480">
-                <a:tc>
-                  <a:txBody>
-                    <a:bodyPr wrap="square"/>
-                    <a:lstStyle/>
-                    <a:p>
-                      <a:pPr algn="l"/>
-                      <a:r>
-                        <a:rPr sz="1300" b="0">
+              <a:tr h="402336">
+                <a:tc>
+                  <a:txBody>
+                    <a:bodyPr wrap="square"/>
+                    <a:lstStyle/>
+                    <a:p>
+                      <a:pPr algn="l"/>
+                      <a:r>
+                        <a:rPr sz="1200" b="0">
                           <a:solidFill>
                             <a:srgbClr val="1A1A2E"/>
                           </a:solidFill>
@@ -21617,7 +22908,7 @@
                     <a:p>
                       <a:pPr algn="l"/>
                       <a:r>
-                        <a:rPr sz="1300" b="0">
+                        <a:rPr sz="1200" b="0">
                           <a:solidFill>
                             <a:srgbClr val="1A1A2E"/>
                           </a:solidFill>
@@ -21640,7 +22931,7 @@
                     <a:p>
                       <a:pPr algn="l"/>
                       <a:r>
-                        <a:rPr sz="1300" b="0">
+                        <a:rPr sz="1200" b="0">
                           <a:solidFill>
                             <a:srgbClr val="1A1A2E"/>
                           </a:solidFill>
@@ -21657,21 +22948,21 @@
                   </a:tcPr>
                 </a:tc>
               </a:tr>
-              <a:tr h="411480">
-                <a:tc>
-                  <a:txBody>
-                    <a:bodyPr wrap="square"/>
-                    <a:lstStyle/>
-                    <a:p>
-                      <a:pPr algn="l"/>
-                      <a:r>
-                        <a:rPr sz="1300" b="0">
+              <a:tr h="402336">
+                <a:tc>
+                  <a:txBody>
+                    <a:bodyPr wrap="square"/>
+                    <a:lstStyle/>
+                    <a:p>
+                      <a:pPr algn="l"/>
+                      <a:r>
+                        <a:rPr sz="1200" b="0">
                           <a:solidFill>
                             <a:srgbClr val="1A1A2E"/>
                           </a:solidFill>
                           <a:latin typeface="游ゴシック"/>
                         </a:rPr>
-                        <a:t>Max_C / Min_C</a:t>
+                        <a:t>Max_C</a:t>
                       </a:r>
                     </a:p>
                   </a:txBody>
@@ -21688,13 +22979,13 @@
                     <a:p>
                       <a:pPr algn="l"/>
                       <a:r>
-                        <a:rPr sz="1300" b="0">
+                        <a:rPr sz="1200" b="0">
                           <a:solidFill>
                             <a:srgbClr val="1A1A2E"/>
                           </a:solidFill>
                           <a:latin typeface="游ゴシック"/>
                         </a:rPr>
-                        <a:t>最大値 / 最小値</a:t>
+                        <a:t>計測開始からの最大値（℃）</a:t>
                       </a:r>
                     </a:p>
                   </a:txBody>
@@ -21711,13 +23002,13 @@
                     <a:p>
                       <a:pPr algn="l"/>
                       <a:r>
-                        <a:rPr sz="1300" b="0">
+                        <a:rPr sz="1200" b="0">
                           <a:solidFill>
                             <a:srgbClr val="1A1A2E"/>
                           </a:solidFill>
                           <a:latin typeface="游ゴシック"/>
                         </a:rPr>
-                        <a:t>128.0 / 121.5</a:t>
+                        <a:t>128.0</a:t>
                       </a:r>
                     </a:p>
                   </a:txBody>
@@ -21728,21 +23019,21 @@
                   </a:tcPr>
                 </a:tc>
               </a:tr>
-              <a:tr h="411480">
-                <a:tc>
-                  <a:txBody>
-                    <a:bodyPr wrap="square"/>
-                    <a:lstStyle/>
-                    <a:p>
-                      <a:pPr algn="l"/>
-                      <a:r>
-                        <a:rPr sz="1300" b="0">
+              <a:tr h="402336">
+                <a:tc>
+                  <a:txBody>
+                    <a:bodyPr wrap="square"/>
+                    <a:lstStyle/>
+                    <a:p>
+                      <a:pPr algn="l"/>
+                      <a:r>
+                        <a:rPr sz="1200" b="0">
                           <a:solidFill>
                             <a:srgbClr val="1A1A2E"/>
                           </a:solidFill>
                           <a:latin typeface="游ゴシック"/>
                         </a:rPr>
-                        <a:t>Alarm</a:t>
+                        <a:t>Min_C</a:t>
                       </a:r>
                     </a:p>
                   </a:txBody>
@@ -21759,13 +23050,13 @@
                     <a:p>
                       <a:pPr algn="l"/>
                       <a:r>
-                        <a:rPr sz="1300" b="0">
+                        <a:rPr sz="1200" b="0">
                           <a:solidFill>
                             <a:srgbClr val="1A1A2E"/>
                           </a:solidFill>
                           <a:latin typeface="游ゴシック"/>
                         </a:rPr>
-                        <a:t>アラーム状態</a:t>
+                        <a:t>計測開始からの最小値（℃）</a:t>
                       </a:r>
                     </a:p>
                   </a:txBody>
@@ -21782,13 +23073,155 @@
                     <a:p>
                       <a:pPr algn="l"/>
                       <a:r>
-                        <a:rPr sz="1300" b="0">
+                        <a:rPr sz="1200" b="0">
                           <a:solidFill>
                             <a:srgbClr val="1A1A2E"/>
                           </a:solidFill>
                           <a:latin typeface="游ゴシック"/>
                         </a:rPr>
-                        <a:t>OK / AL_HI / AL_LO</a:t>
+                        <a:t>121.5</a:t>
+                      </a:r>
+                    </a:p>
+                  </a:txBody>
+                  <a:tcPr>
+                    <a:solidFill>
+                      <a:srgbClr val="E8EEF4"/>
+                    </a:solidFill>
+                  </a:tcPr>
+                </a:tc>
+              </a:tr>
+              <a:tr h="402336">
+                <a:tc>
+                  <a:txBody>
+                    <a:bodyPr wrap="square"/>
+                    <a:lstStyle/>
+                    <a:p>
+                      <a:pPr algn="l"/>
+                      <a:r>
+                        <a:rPr sz="1200" b="0">
+                          <a:solidFill>
+                            <a:srgbClr val="1A1A2E"/>
+                          </a:solidFill>
+                          <a:latin typeface="游ゴシック"/>
+                        </a:rPr>
+                        <a:t>HI_ALARM</a:t>
+                      </a:r>
+                    </a:p>
+                  </a:txBody>
+                  <a:tcPr>
+                    <a:solidFill>
+                      <a:srgbClr val="FFFFFF"/>
+                    </a:solidFill>
+                  </a:tcPr>
+                </a:tc>
+                <a:tc>
+                  <a:txBody>
+                    <a:bodyPr wrap="square"/>
+                    <a:lstStyle/>
+                    <a:p>
+                      <a:pPr algn="l"/>
+                      <a:r>
+                        <a:rPr sz="1200" b="0">
+                          <a:solidFill>
+                            <a:srgbClr val="1A1A2E"/>
+                          </a:solidFill>
+                          <a:latin typeface="游ゴシック"/>
+                        </a:rPr>
+                        <a:t>上限アラーム発報フラグ</a:t>
+                      </a:r>
+                    </a:p>
+                  </a:txBody>
+                  <a:tcPr>
+                    <a:solidFill>
+                      <a:srgbClr val="FFFFFF"/>
+                    </a:solidFill>
+                  </a:tcPr>
+                </a:tc>
+                <a:tc>
+                  <a:txBody>
+                    <a:bodyPr wrap="square"/>
+                    <a:lstStyle/>
+                    <a:p>
+                      <a:pPr algn="l"/>
+                      <a:r>
+                        <a:rPr sz="1200" b="0">
+                          <a:solidFill>
+                            <a:srgbClr val="1A1A2E"/>
+                          </a:solidFill>
+                          <a:latin typeface="游ゴシック"/>
+                        </a:rPr>
+                        <a:t>0 / 1</a:t>
+                      </a:r>
+                    </a:p>
+                  </a:txBody>
+                  <a:tcPr>
+                    <a:solidFill>
+                      <a:srgbClr val="FFFFFF"/>
+                    </a:solidFill>
+                  </a:tcPr>
+                </a:tc>
+              </a:tr>
+              <a:tr h="402336">
+                <a:tc>
+                  <a:txBody>
+                    <a:bodyPr wrap="square"/>
+                    <a:lstStyle/>
+                    <a:p>
+                      <a:pPr algn="l"/>
+                      <a:r>
+                        <a:rPr sz="1200" b="0">
+                          <a:solidFill>
+                            <a:srgbClr val="1A1A2E"/>
+                          </a:solidFill>
+                          <a:latin typeface="游ゴシック"/>
+                        </a:rPr>
+                        <a:t>LO_ALARM</a:t>
+                      </a:r>
+                    </a:p>
+                  </a:txBody>
+                  <a:tcPr>
+                    <a:solidFill>
+                      <a:srgbClr val="E8EEF4"/>
+                    </a:solidFill>
+                  </a:tcPr>
+                </a:tc>
+                <a:tc>
+                  <a:txBody>
+                    <a:bodyPr wrap="square"/>
+                    <a:lstStyle/>
+                    <a:p>
+                      <a:pPr algn="l"/>
+                      <a:r>
+                        <a:rPr sz="1200" b="0">
+                          <a:solidFill>
+                            <a:srgbClr val="1A1A2E"/>
+                          </a:solidFill>
+                          <a:latin typeface="游ゴシック"/>
+                        </a:rPr>
+                        <a:t>下限アラーム発報フラグ</a:t>
+                      </a:r>
+                    </a:p>
+                  </a:txBody>
+                  <a:tcPr>
+                    <a:solidFill>
+                      <a:srgbClr val="E8EEF4"/>
+                    </a:solidFill>
+                  </a:tcPr>
+                </a:tc>
+                <a:tc>
+                  <a:txBody>
+                    <a:bodyPr wrap="square"/>
+                    <a:lstStyle/>
+                    <a:p>
+                      <a:pPr algn="l"/>
+                      <a:r>
+                        <a:rPr sz="1200" b="0">
+                          <a:solidFill>
+                            <a:srgbClr val="1A1A2E"/>
+                          </a:solidFill>
+                          <a:latin typeface="游ゴシック"/>
+                        </a:rPr>
+                        <a:t>0 / 1</a:t>
                       </a:r>
                     </a:p>
                   </a:txBody>
@@ -21805,14 +23238,14 @@
       </p:graphicFrame>
       <p:sp>
         <p:nvSpPr>
-          <p:cNvPr id="12" name="TextBox 11"/>
+          <p:cNvPr id="13" name="TextBox 12"/>
           <p:cNvSpPr txBox="1"/>
           <p:nvPr/>
         </p:nvSpPr>
         <p:spPr>
           <a:xfrm>
-            <a:off x="6492240" y="1097280"/>
-            <a:ext cx="5303520" cy="411480"/>
+            <a:off x="7635240" y="1097280"/>
+            <a:ext cx="4389120" cy="384048"/>
           </a:xfrm>
           <a:prstGeom prst="rect">
             <a:avLst/>
@@ -21827,7 +23260,7 @@
           <a:p>
             <a:pPr algn="l"/>
             <a:r>
-              <a:rPr sz="1700" b="1" i="0">
+              <a:rPr sz="1600" b="1" i="0">
                 <a:solidFill>
                   <a:srgbClr val="0D2B45"/>
                 </a:solidFill>
@@ -21840,14 +23273,14 @@
       </p:sp>
       <p:sp>
         <p:nvSpPr>
-          <p:cNvPr id="13" name="TextBox 12"/>
+          <p:cNvPr id="14" name="TextBox 13"/>
           <p:cNvSpPr txBox="1"/>
           <p:nvPr/>
         </p:nvSpPr>
         <p:spPr>
           <a:xfrm>
-            <a:off x="6492240" y="1600200"/>
-            <a:ext cx="5303520" cy="594360"/>
+            <a:off x="7635240" y="1572768"/>
+            <a:ext cx="4389120" cy="594360"/>
           </a:xfrm>
           <a:prstGeom prst="rect">
             <a:avLst/>
@@ -21868,21 +23301,21 @@
                 </a:solidFill>
                 <a:latin typeface="游ゴシック"/>
               </a:rPr>
-              <a:t>① 計測終了後、MicroSDカードをPCに挿入</a:t>
-            </a:r>
-          </a:p>
-        </p:txBody>
-      </p:sp>
-      <p:sp>
-        <p:nvSpPr>
-          <p:cNvPr id="14" name="TextBox 13"/>
+              <a:t>① BtnA で計測終了（RESULT画面）</a:t>
+            </a:r>
+          </a:p>
+        </p:txBody>
+      </p:sp>
+      <p:sp>
+        <p:nvSpPr>
+          <p:cNvPr id="15" name="TextBox 14"/>
           <p:cNvSpPr txBox="1"/>
           <p:nvPr/>
         </p:nvSpPr>
         <p:spPr>
           <a:xfrm>
-            <a:off x="6492240" y="2258568"/>
-            <a:ext cx="5303520" cy="594360"/>
+            <a:off x="7635240" y="2231136"/>
+            <a:ext cx="4389120" cy="594360"/>
           </a:xfrm>
           <a:prstGeom prst="rect">
             <a:avLst/>
@@ -21903,21 +23336,21 @@
                 </a:solidFill>
                 <a:latin typeface="游ゴシック"/>
               </a:rPr>
-              <a:t>② ファイル名「DATA_0001.csv」を確認</a:t>
-            </a:r>
-          </a:p>
-        </p:txBody>
-      </p:sp>
-      <p:sp>
-        <p:nvSpPr>
-          <p:cNvPr id="15" name="TextBox 14"/>
+              <a:t>② MicroSDカードをPCに挿入</a:t>
+            </a:r>
+          </a:p>
+        </p:txBody>
+      </p:sp>
+      <p:sp>
+        <p:nvSpPr>
+          <p:cNvPr id="16" name="TextBox 15"/>
           <p:cNvSpPr txBox="1"/>
           <p:nvPr/>
         </p:nvSpPr>
         <p:spPr>
           <a:xfrm>
-            <a:off x="6492240" y="2916936"/>
-            <a:ext cx="5303520" cy="594360"/>
+            <a:off x="7635240" y="2889504"/>
+            <a:ext cx="4389120" cy="594360"/>
           </a:xfrm>
           <a:prstGeom prst="rect">
             <a:avLst/>
@@ -21938,21 +23371,21 @@
                 </a:solidFill>
                 <a:latin typeface="游ゴシック"/>
               </a:rPr>
-              <a:t>③ Excelで「ファイル→開く」からCSVを選択</a:t>
-            </a:r>
-          </a:p>
-        </p:txBody>
-      </p:sp>
-      <p:sp>
-        <p:nvSpPr>
-          <p:cNvPr id="16" name="TextBox 15"/>
+              <a:t>③ DATA_0000.csv を開く（連番で採番）</a:t>
+            </a:r>
+          </a:p>
+        </p:txBody>
+      </p:sp>
+      <p:sp>
+        <p:nvSpPr>
+          <p:cNvPr id="17" name="TextBox 16"/>
           <p:cNvSpPr txBox="1"/>
           <p:nvPr/>
         </p:nvSpPr>
         <p:spPr>
           <a:xfrm>
-            <a:off x="6492240" y="3575304"/>
-            <a:ext cx="5303520" cy="594360"/>
+            <a:off x="7635240" y="3547872"/>
+            <a:ext cx="4389120" cy="594360"/>
           </a:xfrm>
           <a:prstGeom prst="rect">
             <a:avLst/>
@@ -21973,21 +23406,21 @@
                 </a:solidFill>
                 <a:latin typeface="游ゴシック"/>
               </a:rPr>
-              <a:t>④ 各列が自動的に分割されて読込まれる</a:t>
-            </a:r>
-          </a:p>
-        </p:txBody>
-      </p:sp>
-      <p:sp>
-        <p:nvSpPr>
-          <p:cNvPr id="17" name="TextBox 16"/>
+              <a:t>④ Excelが列を自動認識して読込み</a:t>
+            </a:r>
+          </a:p>
+        </p:txBody>
+      </p:sp>
+      <p:sp>
+        <p:nvSpPr>
+          <p:cNvPr id="18" name="TextBox 17"/>
           <p:cNvSpPr txBox="1"/>
           <p:nvPr/>
         </p:nvSpPr>
         <p:spPr>
           <a:xfrm>
-            <a:off x="6492240" y="4233672"/>
-            <a:ext cx="5303520" cy="594360"/>
+            <a:off x="7635240" y="4206240"/>
+            <a:ext cx="4389120" cy="594360"/>
           </a:xfrm>
           <a:prstGeom prst="rect">
             <a:avLst/>
@@ -22008,21 +23441,21 @@
                 </a:solidFill>
                 <a:latin typeface="游ゴシック"/>
               </a:rPr>
-              <a:t>⑤ Temp_C列を選択してグラフを挿入</a:t>
-            </a:r>
-          </a:p>
-        </p:txBody>
-      </p:sp>
-      <p:sp>
-        <p:nvSpPr>
-          <p:cNvPr id="18" name="TextBox 17"/>
+              <a:t>⑤ ElapsedSec を横軸にグラフ挿入</a:t>
+            </a:r>
+          </a:p>
+        </p:txBody>
+      </p:sp>
+      <p:sp>
+        <p:nvSpPr>
+          <p:cNvPr id="19" name="TextBox 18"/>
           <p:cNvSpPr txBox="1"/>
           <p:nvPr/>
         </p:nvSpPr>
         <p:spPr>
           <a:xfrm>
-            <a:off x="6492240" y="4892040"/>
-            <a:ext cx="5303520" cy="594360"/>
+            <a:off x="7635240" y="4864607"/>
+            <a:ext cx="4389120" cy="594360"/>
           </a:xfrm>
           <a:prstGeom prst="rect">
             <a:avLst/>
@@ -22043,22 +23476,22 @@
                 </a:solidFill>
                 <a:latin typeface="游ゴシック"/>
               </a:rPr>
-              <a:t>⑥ 統計列（Average_C / StdDev_C）も
-　追加グラフ化が可能</a:t>
-            </a:r>
-          </a:p>
-        </p:txBody>
-      </p:sp>
-      <p:sp>
-        <p:nvSpPr>
-          <p:cNvPr id="19" name="Rectangle 18"/>
+              <a:t>⑥ HI_ALARM/LO_ALARM列で
+　フィルタをかけて異常点を確認</a:t>
+            </a:r>
+          </a:p>
+        </p:txBody>
+      </p:sp>
+      <p:sp>
+        <p:nvSpPr>
+          <p:cNvPr id="20" name="Rectangle 19"/>
           <p:cNvSpPr/>
           <p:nvPr/>
         </p:nvSpPr>
         <p:spPr>
           <a:xfrm>
-            <a:off x="320040" y="5806440"/>
-            <a:ext cx="11521440" cy="621792"/>
+            <a:off x="320040" y="5925312"/>
+            <a:ext cx="11521440" cy="502920"/>
           </a:xfrm>
           <a:prstGeom prst="rect">
             <a:avLst/>
@@ -22094,14 +23527,14 @@
       </p:sp>
       <p:sp>
         <p:nvSpPr>
-          <p:cNvPr id="20" name="TextBox 19"/>
+          <p:cNvPr id="21" name="TextBox 20"/>
           <p:cNvSpPr txBox="1"/>
           <p:nvPr/>
         </p:nvSpPr>
         <p:spPr>
           <a:xfrm>
-            <a:off x="457200" y="5824728"/>
-            <a:ext cx="11155680" cy="548640"/>
+            <a:off x="457200" y="5961888"/>
+            <a:ext cx="11155680" cy="438912"/>
           </a:xfrm>
           <a:prstGeom prst="rect">
             <a:avLst/>
@@ -22122,7 +23555,7 @@
                 </a:solidFill>
                 <a:latin typeface="游ゴシック"/>
               </a:rPr>
-              <a:t>📁  ファイル名は計測ごとに自動採番 (DATA_0001 → DATA_0002 → … )。同名ファイルは上書きされません。</a:t>
+              <a:t>📁  ファイル名は DATA_0000.csv から自動採番（起動後に /DATA_0000, /DATA_0001 … と増加）。同名上書きなし。</a:t>
             </a:r>
           </a:p>
         </p:txBody>
